--- a/slides/modules/m05-storage-stateful.pptx
+++ b/slides/modules/m05-storage-stateful.pptx
@@ -13,6 +13,7 @@
     <p:sldId id="261" r:id="rId13"/>
     <p:sldId id="262" r:id="rId14"/>
     <p:sldId id="263" r:id="rId15"/>
+    <p:sldId id="264" r:id="rId16"/>
   </p:sldIdLst>
   <p:sldSz cx="12191695" cy="6858000" type="screen4x3"/>
   <p:notesSz cx="6858000" cy="9144000"/>
@@ -930,6 +931,76 @@
           <a:p>
             <a:r>
               <a:t>Land the transfer and stay honest. Discussion prompts: which dev/test datastores are secretly ephemeral; who restores your in-cluster data and when they last tested it; whether your StorageClass is a clean self-service contract. Then the credibility close — production databases run on the platform through Operators (EDB/CloudNativePG, CockroachDB, MongoDB, Couchbase) that own backup, failover, and upgrades, ideally in their own project; a bare StatefulSet is only the plumbing, and a managed service is the hands-off alternative. RWX is the right tool for genuinely shared files but a poor stand-in for a datastore or object store; and caches belong on emptyDir. Backup is its own capability (OADP, a later module).</a:t>
+            </a:r>
+          </a:p>
+        </p:txBody>
+      </p:sp>
+      <p:sp>
+        <p:nvSpPr>
+          <p:cNvPr id="4" name="Slide Number Placeholder 3"/>
+          <p:cNvSpPr>
+            <a:spLocks noGrp="1"/>
+          </p:cNvSpPr>
+          <p:nvPr>
+            <p:ph type="sldNum" idx="5" sz="quarter"/>
+          </p:nvPr>
+        </p:nvSpPr>
+        <p:spPr/>
+      </p:sp>
+    </p:spTree>
+  </p:cSld>
+  <p:clrMapOvr>
+    <a:masterClrMapping/>
+  </p:clrMapOvr>
+</p:notes>
+</file>
+
+<file path=ppt/notesSlides/notesSlide8.xml><?xml version="1.0" encoding="utf-8"?>
+<p:notes xmlns:a="http://schemas.openxmlformats.org/drawingml/2006/main" xmlns:p="http://schemas.openxmlformats.org/presentationml/2006/main" xmlns:r="http://schemas.openxmlformats.org/officeDocument/2006/relationships">
+  <p:cSld>
+    <p:spTree>
+      <p:nvGrpSpPr>
+        <p:cNvPr id="1" name=""/>
+        <p:cNvGrpSpPr/>
+        <p:nvPr/>
+      </p:nvGrpSpPr>
+      <p:grpSpPr>
+        <a:xfrm>
+          <a:off x="0" y="0"/>
+          <a:ext cx="0" cy="0"/>
+          <a:chOff x="0" y="0"/>
+          <a:chExt cx="0" cy="0"/>
+        </a:xfrm>
+      </p:grpSpPr>
+      <p:sp>
+        <p:nvSpPr>
+          <p:cNvPr id="2" name="Slide Image Placeholder 1"/>
+          <p:cNvSpPr>
+            <a:spLocks noGrp="1"/>
+          </p:cNvSpPr>
+          <p:nvPr>
+            <p:ph type="sldImg" idx="2"/>
+          </p:nvPr>
+        </p:nvSpPr>
+        <p:spPr/>
+      </p:sp>
+      <p:sp>
+        <p:nvSpPr>
+          <p:cNvPr id="3" name="Notes Placeholder 2"/>
+          <p:cNvSpPr>
+            <a:spLocks noGrp="1"/>
+          </p:cNvSpPr>
+          <p:nvPr>
+            <p:ph type="body" idx="3" sz="quarter"/>
+          </p:nvPr>
+        </p:nvSpPr>
+        <p:spPr/>
+        <p:txBody>
+          <a:bodyPr/>
+          <a:lstStyle/>
+          <a:p>
+            <a:r>
+              <a:t>Concept diagram: What you built.</a:t>
             </a:r>
           </a:p>
         </p:txBody>
@@ -4307,11 +4378,11 @@
         <p:spPr>
           <a:xfrm>
             <a:off x="841248" y="2395728"/>
-            <a:ext cx="5715000" cy="530352"/>
+            <a:ext cx="5138928" cy="786384"/>
           </a:xfrm>
           <a:prstGeom prst="roundRect">
             <a:avLst>
-              <a:gd name="adj" fmla="val 6000"/>
+              <a:gd name="adj" fmla="val 7000"/>
             </a:avLst>
           </a:prstGeom>
           <a:solidFill>
@@ -4346,9 +4417,55 @@
           </a:p>
         </p:txBody>
       </p:sp>
+      <p:sp>
+        <p:nvSpPr>
+          <p:cNvPr id="7" name="Rounded Rectangle 6"/>
+          <p:cNvSpPr/>
+          <p:nvPr/>
+        </p:nvSpPr>
+        <p:spPr>
+          <a:xfrm>
+            <a:off x="987552" y="2532888"/>
+            <a:ext cx="512064" cy="512064"/>
+          </a:xfrm>
+          <a:prstGeom prst="roundRect">
+            <a:avLst>
+              <a:gd name="adj" fmla="val 26000"/>
+            </a:avLst>
+          </a:prstGeom>
+          <a:solidFill>
+            <a:srgbClr val="EE0000"/>
+          </a:solidFill>
+          <a:ln>
+            <a:noFill/>
+          </a:ln>
+          <a:effectLst/>
+        </p:spPr>
+        <p:style>
+          <a:lnRef idx="1">
+            <a:schemeClr val="accent1"/>
+          </a:lnRef>
+          <a:fillRef idx="3">
+            <a:schemeClr val="accent1"/>
+          </a:fillRef>
+          <a:effectRef idx="2">
+            <a:schemeClr val="accent1"/>
+          </a:effectRef>
+          <a:fontRef idx="minor">
+            <a:schemeClr val="lt1"/>
+          </a:fontRef>
+        </p:style>
+        <p:txBody>
+          <a:bodyPr rtlCol="0" anchor="ctr"/>
+          <a:lstStyle/>
+          <a:p>
+            <a:pPr algn="ctr"/>
+          </a:p>
+        </p:txBody>
+      </p:sp>
       <p:pic>
         <p:nvPicPr>
-          <p:cNvPr id="7" name="Picture 6" descr="check_steel.png"/>
+          <p:cNvPr id="8" name="Picture 7" descr="check_white.png"/>
           <p:cNvPicPr>
             <a:picLocks noChangeAspect="1"/>
           </p:cNvPicPr>
@@ -4362,8 +4479,8 @@
         </p:blipFill>
         <p:spPr>
           <a:xfrm>
-            <a:off x="987552" y="2542032"/>
-            <a:ext cx="237744" cy="237744"/>
+            <a:off x="1110447" y="2655783"/>
+            <a:ext cx="266273" cy="266273"/>
           </a:xfrm>
           <a:prstGeom prst="rect">
             <a:avLst/>
@@ -4372,14 +4489,14 @@
       </p:pic>
       <p:sp>
         <p:nvSpPr>
-          <p:cNvPr id="8" name="TextBox 7"/>
+          <p:cNvPr id="9" name="TextBox 8"/>
           <p:cNvSpPr txBox="1"/>
           <p:nvPr/>
         </p:nvSpPr>
         <p:spPr>
           <a:xfrm>
-            <a:off x="1353312" y="2395728"/>
-            <a:ext cx="5029200" cy="530352"/>
+            <a:off x="1627632" y="2395728"/>
+            <a:ext cx="4206240" cy="786384"/>
           </a:xfrm>
           <a:prstGeom prst="rect">
             <a:avLst/>
@@ -4404,7 +4521,7 @@
               </a:spcAft>
             </a:pPr>
             <a:r>
-              <a:rPr sz="1200" b="0">
+              <a:rPr sz="1150" b="0">
                 <a:solidFill>
                   <a:srgbClr val="1A1A1A"/>
                 </a:solidFill>
@@ -4417,18 +4534,18 @@
       </p:sp>
       <p:sp>
         <p:nvSpPr>
-          <p:cNvPr id="9" name="Rounded Rectangle 8"/>
+          <p:cNvPr id="10" name="Rounded Rectangle 9"/>
           <p:cNvSpPr/>
           <p:nvPr/>
         </p:nvSpPr>
         <p:spPr>
           <a:xfrm>
-            <a:off x="841248" y="2999232"/>
-            <a:ext cx="5715000" cy="530352"/>
+            <a:off x="6254496" y="2395728"/>
+            <a:ext cx="5138928" cy="786384"/>
           </a:xfrm>
           <a:prstGeom prst="roundRect">
             <a:avLst>
-              <a:gd name="adj" fmla="val 6000"/>
+              <a:gd name="adj" fmla="val 7000"/>
             </a:avLst>
           </a:prstGeom>
           <a:solidFill>
@@ -4463,9 +4580,55 @@
           </a:p>
         </p:txBody>
       </p:sp>
+      <p:sp>
+        <p:nvSpPr>
+          <p:cNvPr id="11" name="Rounded Rectangle 10"/>
+          <p:cNvSpPr/>
+          <p:nvPr/>
+        </p:nvSpPr>
+        <p:spPr>
+          <a:xfrm>
+            <a:off x="6400800" y="2532888"/>
+            <a:ext cx="512064" cy="512064"/>
+          </a:xfrm>
+          <a:prstGeom prst="roundRect">
+            <a:avLst>
+              <a:gd name="adj" fmla="val 26000"/>
+            </a:avLst>
+          </a:prstGeom>
+          <a:solidFill>
+            <a:srgbClr val="EE0000"/>
+          </a:solidFill>
+          <a:ln>
+            <a:noFill/>
+          </a:ln>
+          <a:effectLst/>
+        </p:spPr>
+        <p:style>
+          <a:lnRef idx="1">
+            <a:schemeClr val="accent1"/>
+          </a:lnRef>
+          <a:fillRef idx="3">
+            <a:schemeClr val="accent1"/>
+          </a:fillRef>
+          <a:effectRef idx="2">
+            <a:schemeClr val="accent1"/>
+          </a:effectRef>
+          <a:fontRef idx="minor">
+            <a:schemeClr val="lt1"/>
+          </a:fontRef>
+        </p:style>
+        <p:txBody>
+          <a:bodyPr rtlCol="0" anchor="ctr"/>
+          <a:lstStyle/>
+          <a:p>
+            <a:pPr algn="ctr"/>
+          </a:p>
+        </p:txBody>
+      </p:sp>
       <p:pic>
         <p:nvPicPr>
-          <p:cNvPr id="10" name="Picture 9" descr="check_steel.png"/>
+          <p:cNvPr id="12" name="Picture 11" descr="check_white.png"/>
           <p:cNvPicPr>
             <a:picLocks noChangeAspect="1"/>
           </p:cNvPicPr>
@@ -4479,8 +4642,8 @@
         </p:blipFill>
         <p:spPr>
           <a:xfrm>
-            <a:off x="987552" y="3145536"/>
-            <a:ext cx="237744" cy="237744"/>
+            <a:off x="6523695" y="2655783"/>
+            <a:ext cx="266273" cy="266273"/>
           </a:xfrm>
           <a:prstGeom prst="rect">
             <a:avLst/>
@@ -4489,14 +4652,14 @@
       </p:pic>
       <p:sp>
         <p:nvSpPr>
-          <p:cNvPr id="11" name="TextBox 10"/>
+          <p:cNvPr id="13" name="TextBox 12"/>
           <p:cNvSpPr txBox="1"/>
           <p:nvPr/>
         </p:nvSpPr>
         <p:spPr>
           <a:xfrm>
-            <a:off x="1353312" y="2999232"/>
-            <a:ext cx="5029200" cy="530352"/>
+            <a:off x="7040880" y="2395728"/>
+            <a:ext cx="4206240" cy="786384"/>
           </a:xfrm>
           <a:prstGeom prst="rect">
             <a:avLst/>
@@ -4521,7 +4684,7 @@
               </a:spcAft>
             </a:pPr>
             <a:r>
-              <a:rPr sz="1200" b="0">
+              <a:rPr sz="1150" b="0">
                 <a:solidFill>
                   <a:srgbClr val="1A1A1A"/>
                 </a:solidFill>
@@ -4534,18 +4697,18 @@
       </p:sp>
       <p:sp>
         <p:nvSpPr>
-          <p:cNvPr id="12" name="Rounded Rectangle 11"/>
+          <p:cNvPr id="14" name="Rounded Rectangle 13"/>
           <p:cNvSpPr/>
           <p:nvPr/>
         </p:nvSpPr>
         <p:spPr>
           <a:xfrm>
-            <a:off x="841248" y="3602736"/>
-            <a:ext cx="5715000" cy="530352"/>
+            <a:off x="841248" y="3328416"/>
+            <a:ext cx="5138928" cy="786384"/>
           </a:xfrm>
           <a:prstGeom prst="roundRect">
             <a:avLst>
-              <a:gd name="adj" fmla="val 6000"/>
+              <a:gd name="adj" fmla="val 7000"/>
             </a:avLst>
           </a:prstGeom>
           <a:solidFill>
@@ -4580,9 +4743,55 @@
           </a:p>
         </p:txBody>
       </p:sp>
+      <p:sp>
+        <p:nvSpPr>
+          <p:cNvPr id="15" name="Rounded Rectangle 14"/>
+          <p:cNvSpPr/>
+          <p:nvPr/>
+        </p:nvSpPr>
+        <p:spPr>
+          <a:xfrm>
+            <a:off x="987552" y="3465576"/>
+            <a:ext cx="512064" cy="512064"/>
+          </a:xfrm>
+          <a:prstGeom prst="roundRect">
+            <a:avLst>
+              <a:gd name="adj" fmla="val 26000"/>
+            </a:avLst>
+          </a:prstGeom>
+          <a:solidFill>
+            <a:srgbClr val="EE0000"/>
+          </a:solidFill>
+          <a:ln>
+            <a:noFill/>
+          </a:ln>
+          <a:effectLst/>
+        </p:spPr>
+        <p:style>
+          <a:lnRef idx="1">
+            <a:schemeClr val="accent1"/>
+          </a:lnRef>
+          <a:fillRef idx="3">
+            <a:schemeClr val="accent1"/>
+          </a:fillRef>
+          <a:effectRef idx="2">
+            <a:schemeClr val="accent1"/>
+          </a:effectRef>
+          <a:fontRef idx="minor">
+            <a:schemeClr val="lt1"/>
+          </a:fontRef>
+        </p:style>
+        <p:txBody>
+          <a:bodyPr rtlCol="0" anchor="ctr"/>
+          <a:lstStyle/>
+          <a:p>
+            <a:pPr algn="ctr"/>
+          </a:p>
+        </p:txBody>
+      </p:sp>
       <p:pic>
         <p:nvPicPr>
-          <p:cNvPr id="13" name="Picture 12" descr="check_steel.png"/>
+          <p:cNvPr id="16" name="Picture 15" descr="check_white.png"/>
           <p:cNvPicPr>
             <a:picLocks noChangeAspect="1"/>
           </p:cNvPicPr>
@@ -4596,8 +4805,8 @@
         </p:blipFill>
         <p:spPr>
           <a:xfrm>
-            <a:off x="987552" y="3749040"/>
-            <a:ext cx="237744" cy="237744"/>
+            <a:off x="1110447" y="3588471"/>
+            <a:ext cx="266273" cy="266273"/>
           </a:xfrm>
           <a:prstGeom prst="rect">
             <a:avLst/>
@@ -4606,14 +4815,14 @@
       </p:pic>
       <p:sp>
         <p:nvSpPr>
-          <p:cNvPr id="14" name="TextBox 13"/>
+          <p:cNvPr id="17" name="TextBox 16"/>
           <p:cNvSpPr txBox="1"/>
           <p:nvPr/>
         </p:nvSpPr>
         <p:spPr>
           <a:xfrm>
-            <a:off x="1353312" y="3602736"/>
-            <a:ext cx="5029200" cy="530352"/>
+            <a:off x="1627632" y="3328416"/>
+            <a:ext cx="4206240" cy="786384"/>
           </a:xfrm>
           <a:prstGeom prst="rect">
             <a:avLst/>
@@ -4638,7 +4847,7 @@
               </a:spcAft>
             </a:pPr>
             <a:r>
-              <a:rPr sz="1200" b="0">
+              <a:rPr sz="1150" b="0">
                 <a:solidFill>
                   <a:srgbClr val="1A1A1A"/>
                 </a:solidFill>
@@ -4651,18 +4860,18 @@
       </p:sp>
       <p:sp>
         <p:nvSpPr>
-          <p:cNvPr id="15" name="Rounded Rectangle 14"/>
+          <p:cNvPr id="18" name="Rounded Rectangle 17"/>
           <p:cNvSpPr/>
           <p:nvPr/>
         </p:nvSpPr>
         <p:spPr>
           <a:xfrm>
-            <a:off x="841248" y="4206240"/>
-            <a:ext cx="5715000" cy="530352"/>
+            <a:off x="6254496" y="3328416"/>
+            <a:ext cx="5138928" cy="786384"/>
           </a:xfrm>
           <a:prstGeom prst="roundRect">
             <a:avLst>
-              <a:gd name="adj" fmla="val 6000"/>
+              <a:gd name="adj" fmla="val 7000"/>
             </a:avLst>
           </a:prstGeom>
           <a:solidFill>
@@ -4697,9 +4906,55 @@
           </a:p>
         </p:txBody>
       </p:sp>
+      <p:sp>
+        <p:nvSpPr>
+          <p:cNvPr id="19" name="Rounded Rectangle 18"/>
+          <p:cNvSpPr/>
+          <p:nvPr/>
+        </p:nvSpPr>
+        <p:spPr>
+          <a:xfrm>
+            <a:off x="6400800" y="3465576"/>
+            <a:ext cx="512064" cy="512064"/>
+          </a:xfrm>
+          <a:prstGeom prst="roundRect">
+            <a:avLst>
+              <a:gd name="adj" fmla="val 26000"/>
+            </a:avLst>
+          </a:prstGeom>
+          <a:solidFill>
+            <a:srgbClr val="EE0000"/>
+          </a:solidFill>
+          <a:ln>
+            <a:noFill/>
+          </a:ln>
+          <a:effectLst/>
+        </p:spPr>
+        <p:style>
+          <a:lnRef idx="1">
+            <a:schemeClr val="accent1"/>
+          </a:lnRef>
+          <a:fillRef idx="3">
+            <a:schemeClr val="accent1"/>
+          </a:fillRef>
+          <a:effectRef idx="2">
+            <a:schemeClr val="accent1"/>
+          </a:effectRef>
+          <a:fontRef idx="minor">
+            <a:schemeClr val="lt1"/>
+          </a:fontRef>
+        </p:style>
+        <p:txBody>
+          <a:bodyPr rtlCol="0" anchor="ctr"/>
+          <a:lstStyle/>
+          <a:p>
+            <a:pPr algn="ctr"/>
+          </a:p>
+        </p:txBody>
+      </p:sp>
       <p:pic>
         <p:nvPicPr>
-          <p:cNvPr id="16" name="Picture 15" descr="check_steel.png"/>
+          <p:cNvPr id="20" name="Picture 19" descr="check_white.png"/>
           <p:cNvPicPr>
             <a:picLocks noChangeAspect="1"/>
           </p:cNvPicPr>
@@ -4713,8 +4968,8 @@
         </p:blipFill>
         <p:spPr>
           <a:xfrm>
-            <a:off x="987552" y="4352544"/>
-            <a:ext cx="237744" cy="237744"/>
+            <a:off x="6523695" y="3588471"/>
+            <a:ext cx="266273" cy="266273"/>
           </a:xfrm>
           <a:prstGeom prst="rect">
             <a:avLst/>
@@ -4723,14 +4978,14 @@
       </p:pic>
       <p:sp>
         <p:nvSpPr>
-          <p:cNvPr id="17" name="TextBox 16"/>
+          <p:cNvPr id="21" name="TextBox 20"/>
           <p:cNvSpPr txBox="1"/>
           <p:nvPr/>
         </p:nvSpPr>
         <p:spPr>
           <a:xfrm>
-            <a:off x="1353312" y="4206240"/>
-            <a:ext cx="5029200" cy="530352"/>
+            <a:off x="7040880" y="3328416"/>
+            <a:ext cx="4206240" cy="786384"/>
           </a:xfrm>
           <a:prstGeom prst="rect">
             <a:avLst/>
@@ -4755,7 +5010,7 @@
               </a:spcAft>
             </a:pPr>
             <a:r>
-              <a:rPr sz="1200" b="0">
+              <a:rPr sz="1150" b="0">
                 <a:solidFill>
                   <a:srgbClr val="1A1A1A"/>
                 </a:solidFill>
@@ -4768,18 +5023,18 @@
       </p:sp>
       <p:sp>
         <p:nvSpPr>
-          <p:cNvPr id="18" name="Rounded Rectangle 17"/>
+          <p:cNvPr id="22" name="Rounded Rectangle 21"/>
           <p:cNvSpPr/>
           <p:nvPr/>
         </p:nvSpPr>
         <p:spPr>
           <a:xfrm>
-            <a:off x="841248" y="4809744"/>
-            <a:ext cx="5715000" cy="530352"/>
+            <a:off x="841248" y="4261104"/>
+            <a:ext cx="5138928" cy="786384"/>
           </a:xfrm>
           <a:prstGeom prst="roundRect">
             <a:avLst>
-              <a:gd name="adj" fmla="val 6000"/>
+              <a:gd name="adj" fmla="val 7000"/>
             </a:avLst>
           </a:prstGeom>
           <a:solidFill>
@@ -4814,9 +5069,55 @@
           </a:p>
         </p:txBody>
       </p:sp>
+      <p:sp>
+        <p:nvSpPr>
+          <p:cNvPr id="23" name="Rounded Rectangle 22"/>
+          <p:cNvSpPr/>
+          <p:nvPr/>
+        </p:nvSpPr>
+        <p:spPr>
+          <a:xfrm>
+            <a:off x="987552" y="4398264"/>
+            <a:ext cx="512064" cy="512064"/>
+          </a:xfrm>
+          <a:prstGeom prst="roundRect">
+            <a:avLst>
+              <a:gd name="adj" fmla="val 26000"/>
+            </a:avLst>
+          </a:prstGeom>
+          <a:solidFill>
+            <a:srgbClr val="EE0000"/>
+          </a:solidFill>
+          <a:ln>
+            <a:noFill/>
+          </a:ln>
+          <a:effectLst/>
+        </p:spPr>
+        <p:style>
+          <a:lnRef idx="1">
+            <a:schemeClr val="accent1"/>
+          </a:lnRef>
+          <a:fillRef idx="3">
+            <a:schemeClr val="accent1"/>
+          </a:fillRef>
+          <a:effectRef idx="2">
+            <a:schemeClr val="accent1"/>
+          </a:effectRef>
+          <a:fontRef idx="minor">
+            <a:schemeClr val="lt1"/>
+          </a:fontRef>
+        </p:style>
+        <p:txBody>
+          <a:bodyPr rtlCol="0" anchor="ctr"/>
+          <a:lstStyle/>
+          <a:p>
+            <a:pPr algn="ctr"/>
+          </a:p>
+        </p:txBody>
+      </p:sp>
       <p:pic>
         <p:nvPicPr>
-          <p:cNvPr id="19" name="Picture 18" descr="check_steel.png"/>
+          <p:cNvPr id="24" name="Picture 23" descr="check_white.png"/>
           <p:cNvPicPr>
             <a:picLocks noChangeAspect="1"/>
           </p:cNvPicPr>
@@ -4830,8 +5131,8 @@
         </p:blipFill>
         <p:spPr>
           <a:xfrm>
-            <a:off x="987552" y="4956048"/>
-            <a:ext cx="237744" cy="237744"/>
+            <a:off x="1110447" y="4521159"/>
+            <a:ext cx="266273" cy="266273"/>
           </a:xfrm>
           <a:prstGeom prst="rect">
             <a:avLst/>
@@ -4840,14 +5141,14 @@
       </p:pic>
       <p:sp>
         <p:nvSpPr>
-          <p:cNvPr id="20" name="TextBox 19"/>
+          <p:cNvPr id="25" name="TextBox 24"/>
           <p:cNvSpPr txBox="1"/>
           <p:nvPr/>
         </p:nvSpPr>
         <p:spPr>
           <a:xfrm>
-            <a:off x="1353312" y="4809744"/>
-            <a:ext cx="5029200" cy="530352"/>
+            <a:off x="1627632" y="4261104"/>
+            <a:ext cx="4206240" cy="786384"/>
           </a:xfrm>
           <a:prstGeom prst="rect">
             <a:avLst/>
@@ -4872,221 +5173,13 @@
               </a:spcAft>
             </a:pPr>
             <a:r>
-              <a:rPr sz="1200" b="0">
+              <a:rPr sz="1150" b="0">
                 <a:solidFill>
                   <a:srgbClr val="1A1A1A"/>
                 </a:solidFill>
                 <a:latin typeface="Red Hat Text"/>
               </a:rPr>
               <a:t>Persistence is the missing piece</a:t>
-            </a:r>
-          </a:p>
-        </p:txBody>
-      </p:sp>
-      <p:sp>
-        <p:nvSpPr>
-          <p:cNvPr id="21" name="Rounded Rectangle 20"/>
-          <p:cNvSpPr/>
-          <p:nvPr/>
-        </p:nvSpPr>
-        <p:spPr>
-          <a:xfrm>
-            <a:off x="6812280" y="2395728"/>
-            <a:ext cx="4538167" cy="2944368"/>
-          </a:xfrm>
-          <a:prstGeom prst="roundRect">
-            <a:avLst>
-              <a:gd name="adj" fmla="val 4000"/>
-            </a:avLst>
-          </a:prstGeom>
-          <a:solidFill>
-            <a:srgbClr val="FFFFFF"/>
-          </a:solidFill>
-          <a:ln w="15240">
-            <a:solidFill>
-              <a:srgbClr val="DDE1E6"/>
-            </a:solidFill>
-          </a:ln>
-          <a:effectLst/>
-        </p:spPr>
-        <p:style>
-          <a:lnRef idx="1">
-            <a:schemeClr val="accent1"/>
-          </a:lnRef>
-          <a:fillRef idx="3">
-            <a:schemeClr val="accent1"/>
-          </a:fillRef>
-          <a:effectRef idx="2">
-            <a:schemeClr val="accent1"/>
-          </a:effectRef>
-          <a:fontRef idx="minor">
-            <a:schemeClr val="lt1"/>
-          </a:fontRef>
-        </p:style>
-        <p:txBody>
-          <a:bodyPr rtlCol="0" anchor="ctr"/>
-          <a:lstStyle/>
-          <a:p>
-            <a:pPr algn="ctr"/>
-          </a:p>
-        </p:txBody>
-      </p:sp>
-      <p:sp>
-        <p:nvSpPr>
-          <p:cNvPr id="22" name="Rounded Rectangle 21"/>
-          <p:cNvSpPr/>
-          <p:nvPr/>
-        </p:nvSpPr>
-        <p:spPr>
-          <a:xfrm>
-            <a:off x="7013448" y="2596896"/>
-            <a:ext cx="1298448" cy="310896"/>
-          </a:xfrm>
-          <a:prstGeom prst="roundRect">
-            <a:avLst>
-              <a:gd name="adj" fmla="val 50000"/>
-            </a:avLst>
-          </a:prstGeom>
-          <a:solidFill>
-            <a:srgbClr val="FCECEC"/>
-          </a:solidFill>
-          <a:ln>
-            <a:noFill/>
-          </a:ln>
-          <a:effectLst/>
-        </p:spPr>
-        <p:style>
-          <a:lnRef idx="1">
-            <a:schemeClr val="accent1"/>
-          </a:lnRef>
-          <a:fillRef idx="3">
-            <a:schemeClr val="accent1"/>
-          </a:fillRef>
-          <a:effectRef idx="2">
-            <a:schemeClr val="accent1"/>
-          </a:effectRef>
-          <a:fontRef idx="minor">
-            <a:schemeClr val="lt1"/>
-          </a:fontRef>
-        </p:style>
-        <p:txBody>
-          <a:bodyPr rtlCol="0" anchor="ctr"/>
-          <a:lstStyle/>
-          <a:p>
-            <a:pPr algn="ctr"/>
-          </a:p>
-        </p:txBody>
-      </p:sp>
-      <p:sp>
-        <p:nvSpPr>
-          <p:cNvPr id="23" name="TextBox 22"/>
-          <p:cNvSpPr txBox="1"/>
-          <p:nvPr/>
-        </p:nvSpPr>
-        <p:spPr>
-          <a:xfrm>
-            <a:off x="7013448" y="2596896"/>
-            <a:ext cx="1298448" cy="310896"/>
-          </a:xfrm>
-          <a:prstGeom prst="rect">
-            <a:avLst/>
-          </a:prstGeom>
-          <a:noFill/>
-        </p:spPr>
-        <p:txBody>
-          <a:bodyPr wrap="none" anchor="ctr" lIns="0" rIns="0" tIns="0" bIns="0">
-            <a:spAutoFit/>
-          </a:bodyPr>
-          <a:lstStyle/>
-          <a:p>
-            <a:pPr algn="ctr">
-              <a:lnSpc>
-                <a:spcPct val="106000"/>
-              </a:lnSpc>
-              <a:spcBef>
-                <a:spcPts val="0"/>
-              </a:spcBef>
-              <a:spcAft>
-                <a:spcPts val="0"/>
-              </a:spcAft>
-            </a:pPr>
-            <a:r>
-              <a:rPr sz="850" b="1">
-                <a:solidFill>
-                  <a:srgbClr val="B80000"/>
-                </a:solidFill>
-                <a:latin typeface="Red Hat Display"/>
-              </a:rPr>
-              <a:t>MEDIA PASS</a:t>
-            </a:r>
-          </a:p>
-        </p:txBody>
-      </p:sp>
-      <p:pic>
-        <p:nvPicPr>
-          <p:cNvPr id="24" name="Picture 23" descr="eye_slate.png"/>
-          <p:cNvPicPr>
-            <a:picLocks noChangeAspect="1"/>
-          </p:cNvPicPr>
-          <p:nvPr/>
-        </p:nvPicPr>
-        <p:blipFill>
-          <a:blip r:embed="rId4"/>
-          <a:stretch>
-            <a:fillRect/>
-          </a:stretch>
-        </p:blipFill>
-        <p:spPr>
-          <a:xfrm>
-            <a:off x="8843619" y="3108960"/>
-            <a:ext cx="475488" cy="475488"/>
-          </a:xfrm>
-          <a:prstGeom prst="rect">
-            <a:avLst/>
-          </a:prstGeom>
-        </p:spPr>
-      </p:pic>
-      <p:sp>
-        <p:nvSpPr>
-          <p:cNvPr id="25" name="TextBox 24"/>
-          <p:cNvSpPr txBox="1"/>
-          <p:nvPr/>
-        </p:nvSpPr>
-        <p:spPr>
-          <a:xfrm>
-            <a:off x="7050024" y="3721608"/>
-            <a:ext cx="4062679" cy="1481328"/>
-          </a:xfrm>
-          <a:prstGeom prst="rect">
-            <a:avLst/>
-          </a:prstGeom>
-          <a:noFill/>
-        </p:spPr>
-        <p:txBody>
-          <a:bodyPr wrap="square" anchor="t" lIns="0" rIns="0" tIns="0" bIns="0">
-            <a:spAutoFit/>
-          </a:bodyPr>
-          <a:lstStyle/>
-          <a:p>
-            <a:pPr algn="l">
-              <a:lnSpc>
-                <a:spcPct val="120000"/>
-              </a:lnSpc>
-              <a:spcBef>
-                <a:spcPts val="0"/>
-              </a:spcBef>
-              <a:spcAft>
-                <a:spcPts val="0"/>
-              </a:spcAft>
-            </a:pPr>
-            <a:r>
-              <a:rPr sz="950" b="0">
-                <a:solidFill>
-                  <a:srgbClr val="8A9099"/>
-                </a:solidFill>
-                <a:latin typeface="Red Hat Text"/>
-              </a:rPr>
-              <a:t>A single "Pod restart" arrow turning a database full of claims into an empty one, red X over the lost data.</a:t>
             </a:r>
           </a:p>
         </p:txBody>
@@ -5394,7 +5487,7 @@
         <p:spPr>
           <a:xfrm>
             <a:off x="841248" y="2395728"/>
-            <a:ext cx="5715000" cy="530352"/>
+            <a:ext cx="4160520" cy="475488"/>
           </a:xfrm>
           <a:prstGeom prst="roundRect">
             <a:avLst>
@@ -5449,8 +5542,8 @@
         </p:blipFill>
         <p:spPr>
           <a:xfrm>
-            <a:off x="987552" y="2542032"/>
-            <a:ext cx="237744" cy="237744"/>
+            <a:off x="969264" y="2532888"/>
+            <a:ext cx="201168" cy="201168"/>
           </a:xfrm>
           <a:prstGeom prst="rect">
             <a:avLst/>
@@ -5465,8 +5558,8 @@
         </p:nvSpPr>
         <p:spPr>
           <a:xfrm>
-            <a:off x="1353312" y="2395728"/>
-            <a:ext cx="5029200" cy="530352"/>
+            <a:off x="1280160" y="2395728"/>
+            <a:ext cx="3593591" cy="475488"/>
           </a:xfrm>
           <a:prstGeom prst="rect">
             <a:avLst/>
@@ -5491,7 +5584,7 @@
               </a:spcAft>
             </a:pPr>
             <a:r>
-              <a:rPr sz="1200" b="0">
+              <a:rPr sz="1050" b="0">
                 <a:solidFill>
                   <a:srgbClr val="1A1A1A"/>
                 </a:solidFill>
@@ -5510,8 +5603,8 @@
         </p:nvSpPr>
         <p:spPr>
           <a:xfrm>
-            <a:off x="841248" y="2999232"/>
-            <a:ext cx="5715000" cy="530352"/>
+            <a:off x="841248" y="2944368"/>
+            <a:ext cx="4160520" cy="475488"/>
           </a:xfrm>
           <a:prstGeom prst="roundRect">
             <a:avLst>
@@ -5566,8 +5659,8 @@
         </p:blipFill>
         <p:spPr>
           <a:xfrm>
-            <a:off x="987552" y="3145536"/>
-            <a:ext cx="237744" cy="237744"/>
+            <a:off x="969264" y="3081528"/>
+            <a:ext cx="201168" cy="201168"/>
           </a:xfrm>
           <a:prstGeom prst="rect">
             <a:avLst/>
@@ -5582,8 +5675,8 @@
         </p:nvSpPr>
         <p:spPr>
           <a:xfrm>
-            <a:off x="1353312" y="2999232"/>
-            <a:ext cx="5029200" cy="530352"/>
+            <a:off x="1280160" y="2944368"/>
+            <a:ext cx="3593591" cy="475488"/>
           </a:xfrm>
           <a:prstGeom prst="rect">
             <a:avLst/>
@@ -5608,7 +5701,7 @@
               </a:spcAft>
             </a:pPr>
             <a:r>
-              <a:rPr sz="1200" b="0">
+              <a:rPr sz="1050" b="0">
                 <a:solidFill>
                   <a:srgbClr val="1A1A1A"/>
                 </a:solidFill>
@@ -5627,8 +5720,8 @@
         </p:nvSpPr>
         <p:spPr>
           <a:xfrm>
-            <a:off x="841248" y="3602736"/>
-            <a:ext cx="5715000" cy="530352"/>
+            <a:off x="841248" y="3493008"/>
+            <a:ext cx="4160520" cy="475488"/>
           </a:xfrm>
           <a:prstGeom prst="roundRect">
             <a:avLst>
@@ -5683,8 +5776,8 @@
         </p:blipFill>
         <p:spPr>
           <a:xfrm>
-            <a:off x="987552" y="3749040"/>
-            <a:ext cx="237744" cy="237744"/>
+            <a:off x="969264" y="3630168"/>
+            <a:ext cx="201168" cy="201168"/>
           </a:xfrm>
           <a:prstGeom prst="rect">
             <a:avLst/>
@@ -5699,8 +5792,8 @@
         </p:nvSpPr>
         <p:spPr>
           <a:xfrm>
-            <a:off x="1353312" y="3602736"/>
-            <a:ext cx="5029200" cy="530352"/>
+            <a:off x="1280160" y="3493008"/>
+            <a:ext cx="3593591" cy="475488"/>
           </a:xfrm>
           <a:prstGeom prst="rect">
             <a:avLst/>
@@ -5725,7 +5818,7 @@
               </a:spcAft>
             </a:pPr>
             <a:r>
-              <a:rPr sz="1200" b="0">
+              <a:rPr sz="1050" b="0">
                 <a:solidFill>
                   <a:srgbClr val="1A1A1A"/>
                 </a:solidFill>
@@ -5744,8 +5837,8 @@
         </p:nvSpPr>
         <p:spPr>
           <a:xfrm>
-            <a:off x="841248" y="4206240"/>
-            <a:ext cx="5715000" cy="530352"/>
+            <a:off x="841248" y="4041648"/>
+            <a:ext cx="4160520" cy="475488"/>
           </a:xfrm>
           <a:prstGeom prst="roundRect">
             <a:avLst>
@@ -5800,8 +5893,8 @@
         </p:blipFill>
         <p:spPr>
           <a:xfrm>
-            <a:off x="987552" y="4352544"/>
-            <a:ext cx="237744" cy="237744"/>
+            <a:off x="969264" y="4178807"/>
+            <a:ext cx="201168" cy="201168"/>
           </a:xfrm>
           <a:prstGeom prst="rect">
             <a:avLst/>
@@ -5816,8 +5909,8 @@
         </p:nvSpPr>
         <p:spPr>
           <a:xfrm>
-            <a:off x="1353312" y="4206240"/>
-            <a:ext cx="5029200" cy="530352"/>
+            <a:off x="1280160" y="4041648"/>
+            <a:ext cx="3593591" cy="475488"/>
           </a:xfrm>
           <a:prstGeom prst="rect">
             <a:avLst/>
@@ -5842,7 +5935,7 @@
               </a:spcAft>
             </a:pPr>
             <a:r>
-              <a:rPr sz="1200" b="0">
+              <a:rPr sz="1050" b="0">
                 <a:solidFill>
                   <a:srgbClr val="1A1A1A"/>
                 </a:solidFill>
@@ -5861,8 +5954,8 @@
         </p:nvSpPr>
         <p:spPr>
           <a:xfrm>
-            <a:off x="841248" y="4809744"/>
-            <a:ext cx="5715000" cy="530352"/>
+            <a:off x="841248" y="4590288"/>
+            <a:ext cx="4160520" cy="475488"/>
           </a:xfrm>
           <a:prstGeom prst="roundRect">
             <a:avLst>
@@ -5917,8 +6010,8 @@
         </p:blipFill>
         <p:spPr>
           <a:xfrm>
-            <a:off x="987552" y="4956048"/>
-            <a:ext cx="237744" cy="237744"/>
+            <a:off x="969264" y="4727447"/>
+            <a:ext cx="201168" cy="201168"/>
           </a:xfrm>
           <a:prstGeom prst="rect">
             <a:avLst/>
@@ -5933,8 +6026,8 @@
         </p:nvSpPr>
         <p:spPr>
           <a:xfrm>
-            <a:off x="1353312" y="4809744"/>
-            <a:ext cx="5029200" cy="530352"/>
+            <a:off x="1280160" y="4590288"/>
+            <a:ext cx="3593591" cy="475488"/>
           </a:xfrm>
           <a:prstGeom prst="rect">
             <a:avLst/>
@@ -5959,7 +6052,7 @@
               </a:spcAft>
             </a:pPr>
             <a:r>
-              <a:rPr sz="1200" b="0">
+              <a:rPr sz="1050" b="0">
                 <a:solidFill>
                   <a:srgbClr val="1A1A1A"/>
                 </a:solidFill>
@@ -5978,8 +6071,8 @@
         </p:nvSpPr>
         <p:spPr>
           <a:xfrm>
-            <a:off x="6812280" y="2395728"/>
-            <a:ext cx="4538167" cy="2944368"/>
+            <a:off x="5385816" y="2395728"/>
+            <a:ext cx="2285201" cy="3657600"/>
           </a:xfrm>
           <a:prstGeom prst="roundRect">
             <a:avLst>
@@ -6018,100 +6111,9 @@
           </a:p>
         </p:txBody>
       </p:sp>
-      <p:sp>
-        <p:nvSpPr>
-          <p:cNvPr id="22" name="Rounded Rectangle 21"/>
-          <p:cNvSpPr/>
-          <p:nvPr/>
-        </p:nvSpPr>
-        <p:spPr>
-          <a:xfrm>
-            <a:off x="7013448" y="2596896"/>
-            <a:ext cx="1298448" cy="310896"/>
-          </a:xfrm>
-          <a:prstGeom prst="roundRect">
-            <a:avLst>
-              <a:gd name="adj" fmla="val 50000"/>
-            </a:avLst>
-          </a:prstGeom>
-          <a:solidFill>
-            <a:srgbClr val="FCECEC"/>
-          </a:solidFill>
-          <a:ln>
-            <a:noFill/>
-          </a:ln>
-          <a:effectLst/>
-        </p:spPr>
-        <p:style>
-          <a:lnRef idx="1">
-            <a:schemeClr val="accent1"/>
-          </a:lnRef>
-          <a:fillRef idx="3">
-            <a:schemeClr val="accent1"/>
-          </a:fillRef>
-          <a:effectRef idx="2">
-            <a:schemeClr val="accent1"/>
-          </a:effectRef>
-          <a:fontRef idx="minor">
-            <a:schemeClr val="lt1"/>
-          </a:fontRef>
-        </p:style>
-        <p:txBody>
-          <a:bodyPr rtlCol="0" anchor="ctr"/>
-          <a:lstStyle/>
-          <a:p>
-            <a:pPr algn="ctr"/>
-          </a:p>
-        </p:txBody>
-      </p:sp>
-      <p:sp>
-        <p:nvSpPr>
-          <p:cNvPr id="23" name="TextBox 22"/>
-          <p:cNvSpPr txBox="1"/>
-          <p:nvPr/>
-        </p:nvSpPr>
-        <p:spPr>
-          <a:xfrm>
-            <a:off x="7013448" y="2596896"/>
-            <a:ext cx="1298448" cy="310896"/>
-          </a:xfrm>
-          <a:prstGeom prst="rect">
-            <a:avLst/>
-          </a:prstGeom>
-          <a:noFill/>
-        </p:spPr>
-        <p:txBody>
-          <a:bodyPr wrap="none" anchor="ctr" lIns="0" rIns="0" tIns="0" bIns="0">
-            <a:spAutoFit/>
-          </a:bodyPr>
-          <a:lstStyle/>
-          <a:p>
-            <a:pPr algn="ctr">
-              <a:lnSpc>
-                <a:spcPct val="106000"/>
-              </a:lnSpc>
-              <a:spcBef>
-                <a:spcPts val="0"/>
-              </a:spcBef>
-              <a:spcAft>
-                <a:spcPts val="0"/>
-              </a:spcAft>
-            </a:pPr>
-            <a:r>
-              <a:rPr sz="850" b="1">
-                <a:solidFill>
-                  <a:srgbClr val="B80000"/>
-                </a:solidFill>
-                <a:latin typeface="Red Hat Display"/>
-              </a:rPr>
-              <a:t>MEDIA PASS</a:t>
-            </a:r>
-          </a:p>
-        </p:txBody>
-      </p:sp>
       <p:pic>
         <p:nvPicPr>
-          <p:cNvPr id="24" name="Picture 23" descr="eye_slate.png"/>
+          <p:cNvPr id="22" name="Picture 21" descr="01-storage-chain.png"/>
           <p:cNvPicPr>
             <a:picLocks noChangeAspect="1"/>
           </p:cNvPicPr>
@@ -6125,62 +6127,17 @@
         </p:blipFill>
         <p:spPr>
           <a:xfrm>
-            <a:off x="8843619" y="3108960"/>
-            <a:ext cx="475488" cy="475488"/>
+            <a:off x="5532120" y="2542032"/>
+            <a:ext cx="1992593" cy="3364992"/>
           </a:xfrm>
           <a:prstGeom prst="rect">
             <a:avLst/>
           </a:prstGeom>
         </p:spPr>
       </p:pic>
-      <p:sp>
-        <p:nvSpPr>
-          <p:cNvPr id="25" name="TextBox 24"/>
-          <p:cNvSpPr txBox="1"/>
-          <p:nvPr/>
-        </p:nvSpPr>
-        <p:spPr>
-          <a:xfrm>
-            <a:off x="7050024" y="3721608"/>
-            <a:ext cx="4062679" cy="1481328"/>
-          </a:xfrm>
-          <a:prstGeom prst="rect">
-            <a:avLst/>
-          </a:prstGeom>
-          <a:noFill/>
-        </p:spPr>
-        <p:txBody>
-          <a:bodyPr wrap="square" anchor="t" lIns="0" rIns="0" tIns="0" bIns="0">
-            <a:spAutoFit/>
-          </a:bodyPr>
-          <a:lstStyle/>
-          <a:p>
-            <a:pPr algn="l">
-              <a:lnSpc>
-                <a:spcPct val="120000"/>
-              </a:lnSpc>
-              <a:spcBef>
-                <a:spcPts val="0"/>
-              </a:spcBef>
-              <a:spcAft>
-                <a:spcPts val="0"/>
-              </a:spcAft>
-            </a:pPr>
-            <a:r>
-              <a:rPr sz="950" b="0">
-                <a:solidFill>
-                  <a:srgbClr val="8A9099"/>
-                </a:solidFill>
-                <a:latin typeface="Red Hat Text"/>
-              </a:rPr>
-              <a:t>Reuse concept diagram storage-stateful-...-01-storage-chain.svg — Pod → PVC (namespace) → PV (cluster) → StorageClass → storage backend (Ceph).</a:t>
-            </a:r>
-          </a:p>
-        </p:txBody>
-      </p:sp>
       <p:cxnSp>
         <p:nvCxnSpPr>
-          <p:cNvPr id="26" name="Connector 25"/>
+          <p:cNvPr id="23" name="Connector 22"/>
           <p:cNvCxnSpPr/>
           <p:nvPr/>
         </p:nvCxnSpPr>
@@ -6216,7 +6173,7 @@
       </p:cxnSp>
       <p:sp>
         <p:nvSpPr>
-          <p:cNvPr id="27" name="TextBox 26"/>
+          <p:cNvPr id="24" name="TextBox 23"/>
           <p:cNvSpPr txBox="1"/>
           <p:nvPr/>
         </p:nvSpPr>
@@ -6261,7 +6218,7 @@
       </p:sp>
       <p:sp>
         <p:nvSpPr>
-          <p:cNvPr id="28" name="TextBox 27"/>
+          <p:cNvPr id="25" name="TextBox 24"/>
           <p:cNvSpPr txBox="1"/>
           <p:nvPr/>
         </p:nvSpPr>
@@ -6526,11 +6483,11 @@
         <p:spPr>
           <a:xfrm>
             <a:off x="841248" y="2670048"/>
-            <a:ext cx="5715000" cy="530352"/>
+            <a:ext cx="5138928" cy="786384"/>
           </a:xfrm>
           <a:prstGeom prst="roundRect">
             <a:avLst>
-              <a:gd name="adj" fmla="val 6000"/>
+              <a:gd name="adj" fmla="val 7000"/>
             </a:avLst>
           </a:prstGeom>
           <a:solidFill>
@@ -6565,9 +6522,55 @@
           </a:p>
         </p:txBody>
       </p:sp>
+      <p:sp>
+        <p:nvSpPr>
+          <p:cNvPr id="8" name="Rounded Rectangle 7"/>
+          <p:cNvSpPr/>
+          <p:nvPr/>
+        </p:nvSpPr>
+        <p:spPr>
+          <a:xfrm>
+            <a:off x="987552" y="2807208"/>
+            <a:ext cx="512064" cy="512064"/>
+          </a:xfrm>
+          <a:prstGeom prst="roundRect">
+            <a:avLst>
+              <a:gd name="adj" fmla="val 26000"/>
+            </a:avLst>
+          </a:prstGeom>
+          <a:solidFill>
+            <a:srgbClr val="EE0000"/>
+          </a:solidFill>
+          <a:ln>
+            <a:noFill/>
+          </a:ln>
+          <a:effectLst/>
+        </p:spPr>
+        <p:style>
+          <a:lnRef idx="1">
+            <a:schemeClr val="accent1"/>
+          </a:lnRef>
+          <a:fillRef idx="3">
+            <a:schemeClr val="accent1"/>
+          </a:fillRef>
+          <a:effectRef idx="2">
+            <a:schemeClr val="accent1"/>
+          </a:effectRef>
+          <a:fontRef idx="minor">
+            <a:schemeClr val="lt1"/>
+          </a:fontRef>
+        </p:style>
+        <p:txBody>
+          <a:bodyPr rtlCol="0" anchor="ctr"/>
+          <a:lstStyle/>
+          <a:p>
+            <a:pPr algn="ctr"/>
+          </a:p>
+        </p:txBody>
+      </p:sp>
       <p:pic>
         <p:nvPicPr>
-          <p:cNvPr id="8" name="Picture 7" descr="check_steel.png"/>
+          <p:cNvPr id="9" name="Picture 8" descr="check_white.png"/>
           <p:cNvPicPr>
             <a:picLocks noChangeAspect="1"/>
           </p:cNvPicPr>
@@ -6581,8 +6584,8 @@
         </p:blipFill>
         <p:spPr>
           <a:xfrm>
-            <a:off x="987552" y="2816352"/>
-            <a:ext cx="237744" cy="237744"/>
+            <a:off x="1110447" y="2930103"/>
+            <a:ext cx="266273" cy="266273"/>
           </a:xfrm>
           <a:prstGeom prst="rect">
             <a:avLst/>
@@ -6591,14 +6594,14 @@
       </p:pic>
       <p:sp>
         <p:nvSpPr>
-          <p:cNvPr id="9" name="TextBox 8"/>
+          <p:cNvPr id="10" name="TextBox 9"/>
           <p:cNvSpPr txBox="1"/>
           <p:nvPr/>
         </p:nvSpPr>
         <p:spPr>
           <a:xfrm>
-            <a:off x="1353312" y="2670048"/>
-            <a:ext cx="5029200" cy="530352"/>
+            <a:off x="1627632" y="2670048"/>
+            <a:ext cx="4206240" cy="786384"/>
           </a:xfrm>
           <a:prstGeom prst="rect">
             <a:avLst/>
@@ -6623,7 +6626,7 @@
               </a:spcAft>
             </a:pPr>
             <a:r>
-              <a:rPr sz="1200" b="0">
+              <a:rPr sz="1150" b="0">
                 <a:solidFill>
                   <a:srgbClr val="1A1A1A"/>
                 </a:solidFill>
@@ -6636,18 +6639,18 @@
       </p:sp>
       <p:sp>
         <p:nvSpPr>
-          <p:cNvPr id="10" name="Rounded Rectangle 9"/>
+          <p:cNvPr id="11" name="Rounded Rectangle 10"/>
           <p:cNvSpPr/>
           <p:nvPr/>
         </p:nvSpPr>
         <p:spPr>
           <a:xfrm>
-            <a:off x="841248" y="3273552"/>
-            <a:ext cx="5715000" cy="530352"/>
+            <a:off x="6254496" y="2670048"/>
+            <a:ext cx="5138928" cy="786384"/>
           </a:xfrm>
           <a:prstGeom prst="roundRect">
             <a:avLst>
-              <a:gd name="adj" fmla="val 6000"/>
+              <a:gd name="adj" fmla="val 7000"/>
             </a:avLst>
           </a:prstGeom>
           <a:solidFill>
@@ -6682,9 +6685,55 @@
           </a:p>
         </p:txBody>
       </p:sp>
+      <p:sp>
+        <p:nvSpPr>
+          <p:cNvPr id="12" name="Rounded Rectangle 11"/>
+          <p:cNvSpPr/>
+          <p:nvPr/>
+        </p:nvSpPr>
+        <p:spPr>
+          <a:xfrm>
+            <a:off x="6400800" y="2807208"/>
+            <a:ext cx="512064" cy="512064"/>
+          </a:xfrm>
+          <a:prstGeom prst="roundRect">
+            <a:avLst>
+              <a:gd name="adj" fmla="val 26000"/>
+            </a:avLst>
+          </a:prstGeom>
+          <a:solidFill>
+            <a:srgbClr val="EE0000"/>
+          </a:solidFill>
+          <a:ln>
+            <a:noFill/>
+          </a:ln>
+          <a:effectLst/>
+        </p:spPr>
+        <p:style>
+          <a:lnRef idx="1">
+            <a:schemeClr val="accent1"/>
+          </a:lnRef>
+          <a:fillRef idx="3">
+            <a:schemeClr val="accent1"/>
+          </a:fillRef>
+          <a:effectRef idx="2">
+            <a:schemeClr val="accent1"/>
+          </a:effectRef>
+          <a:fontRef idx="minor">
+            <a:schemeClr val="lt1"/>
+          </a:fontRef>
+        </p:style>
+        <p:txBody>
+          <a:bodyPr rtlCol="0" anchor="ctr"/>
+          <a:lstStyle/>
+          <a:p>
+            <a:pPr algn="ctr"/>
+          </a:p>
+        </p:txBody>
+      </p:sp>
       <p:pic>
         <p:nvPicPr>
-          <p:cNvPr id="11" name="Picture 10" descr="check_steel.png"/>
+          <p:cNvPr id="13" name="Picture 12" descr="check_white.png"/>
           <p:cNvPicPr>
             <a:picLocks noChangeAspect="1"/>
           </p:cNvPicPr>
@@ -6698,8 +6747,8 @@
         </p:blipFill>
         <p:spPr>
           <a:xfrm>
-            <a:off x="987552" y="3419856"/>
-            <a:ext cx="237744" cy="237744"/>
+            <a:off x="6523695" y="2930103"/>
+            <a:ext cx="266273" cy="266273"/>
           </a:xfrm>
           <a:prstGeom prst="rect">
             <a:avLst/>
@@ -6708,14 +6757,14 @@
       </p:pic>
       <p:sp>
         <p:nvSpPr>
-          <p:cNvPr id="12" name="TextBox 11"/>
+          <p:cNvPr id="14" name="TextBox 13"/>
           <p:cNvSpPr txBox="1"/>
           <p:nvPr/>
         </p:nvSpPr>
         <p:spPr>
           <a:xfrm>
-            <a:off x="1353312" y="3273552"/>
-            <a:ext cx="5029200" cy="530352"/>
+            <a:off x="7040880" y="2670048"/>
+            <a:ext cx="4206240" cy="786384"/>
           </a:xfrm>
           <a:prstGeom prst="rect">
             <a:avLst/>
@@ -6740,7 +6789,7 @@
               </a:spcAft>
             </a:pPr>
             <a:r>
-              <a:rPr sz="1200" b="0">
+              <a:rPr sz="1150" b="0">
                 <a:solidFill>
                   <a:srgbClr val="1A1A1A"/>
                 </a:solidFill>
@@ -6753,18 +6802,18 @@
       </p:sp>
       <p:sp>
         <p:nvSpPr>
-          <p:cNvPr id="13" name="Rounded Rectangle 12"/>
+          <p:cNvPr id="15" name="Rounded Rectangle 14"/>
           <p:cNvSpPr/>
           <p:nvPr/>
         </p:nvSpPr>
         <p:spPr>
           <a:xfrm>
-            <a:off x="841248" y="3877056"/>
-            <a:ext cx="5715000" cy="530352"/>
+            <a:off x="841248" y="3602736"/>
+            <a:ext cx="5138928" cy="786384"/>
           </a:xfrm>
           <a:prstGeom prst="roundRect">
             <a:avLst>
-              <a:gd name="adj" fmla="val 6000"/>
+              <a:gd name="adj" fmla="val 7000"/>
             </a:avLst>
           </a:prstGeom>
           <a:solidFill>
@@ -6799,9 +6848,55 @@
           </a:p>
         </p:txBody>
       </p:sp>
+      <p:sp>
+        <p:nvSpPr>
+          <p:cNvPr id="16" name="Rounded Rectangle 15"/>
+          <p:cNvSpPr/>
+          <p:nvPr/>
+        </p:nvSpPr>
+        <p:spPr>
+          <a:xfrm>
+            <a:off x="987552" y="3739896"/>
+            <a:ext cx="512064" cy="512064"/>
+          </a:xfrm>
+          <a:prstGeom prst="roundRect">
+            <a:avLst>
+              <a:gd name="adj" fmla="val 26000"/>
+            </a:avLst>
+          </a:prstGeom>
+          <a:solidFill>
+            <a:srgbClr val="EE0000"/>
+          </a:solidFill>
+          <a:ln>
+            <a:noFill/>
+          </a:ln>
+          <a:effectLst/>
+        </p:spPr>
+        <p:style>
+          <a:lnRef idx="1">
+            <a:schemeClr val="accent1"/>
+          </a:lnRef>
+          <a:fillRef idx="3">
+            <a:schemeClr val="accent1"/>
+          </a:fillRef>
+          <a:effectRef idx="2">
+            <a:schemeClr val="accent1"/>
+          </a:effectRef>
+          <a:fontRef idx="minor">
+            <a:schemeClr val="lt1"/>
+          </a:fontRef>
+        </p:style>
+        <p:txBody>
+          <a:bodyPr rtlCol="0" anchor="ctr"/>
+          <a:lstStyle/>
+          <a:p>
+            <a:pPr algn="ctr"/>
+          </a:p>
+        </p:txBody>
+      </p:sp>
       <p:pic>
         <p:nvPicPr>
-          <p:cNvPr id="14" name="Picture 13" descr="check_steel.png"/>
+          <p:cNvPr id="17" name="Picture 16" descr="check_white.png"/>
           <p:cNvPicPr>
             <a:picLocks noChangeAspect="1"/>
           </p:cNvPicPr>
@@ -6815,8 +6910,8 @@
         </p:blipFill>
         <p:spPr>
           <a:xfrm>
-            <a:off x="987552" y="4023360"/>
-            <a:ext cx="237744" cy="237744"/>
+            <a:off x="1110447" y="3862791"/>
+            <a:ext cx="266273" cy="266273"/>
           </a:xfrm>
           <a:prstGeom prst="rect">
             <a:avLst/>
@@ -6825,14 +6920,14 @@
       </p:pic>
       <p:sp>
         <p:nvSpPr>
-          <p:cNvPr id="15" name="TextBox 14"/>
+          <p:cNvPr id="18" name="TextBox 17"/>
           <p:cNvSpPr txBox="1"/>
           <p:nvPr/>
         </p:nvSpPr>
         <p:spPr>
           <a:xfrm>
-            <a:off x="1353312" y="3877056"/>
-            <a:ext cx="5029200" cy="530352"/>
+            <a:off x="1627632" y="3602736"/>
+            <a:ext cx="4206240" cy="786384"/>
           </a:xfrm>
           <a:prstGeom prst="rect">
             <a:avLst/>
@@ -6857,7 +6952,7 @@
               </a:spcAft>
             </a:pPr>
             <a:r>
-              <a:rPr sz="1200" b="0">
+              <a:rPr sz="1150" b="0">
                 <a:solidFill>
                   <a:srgbClr val="1A1A1A"/>
                 </a:solidFill>
@@ -6870,18 +6965,18 @@
       </p:sp>
       <p:sp>
         <p:nvSpPr>
-          <p:cNvPr id="16" name="Rounded Rectangle 15"/>
+          <p:cNvPr id="19" name="Rounded Rectangle 18"/>
           <p:cNvSpPr/>
           <p:nvPr/>
         </p:nvSpPr>
         <p:spPr>
           <a:xfrm>
-            <a:off x="841248" y="4480560"/>
-            <a:ext cx="5715000" cy="530352"/>
+            <a:off x="6254496" y="3602736"/>
+            <a:ext cx="5138928" cy="786384"/>
           </a:xfrm>
           <a:prstGeom prst="roundRect">
             <a:avLst>
-              <a:gd name="adj" fmla="val 6000"/>
+              <a:gd name="adj" fmla="val 7000"/>
             </a:avLst>
           </a:prstGeom>
           <a:solidFill>
@@ -6916,9 +7011,55 @@
           </a:p>
         </p:txBody>
       </p:sp>
+      <p:sp>
+        <p:nvSpPr>
+          <p:cNvPr id="20" name="Rounded Rectangle 19"/>
+          <p:cNvSpPr/>
+          <p:nvPr/>
+        </p:nvSpPr>
+        <p:spPr>
+          <a:xfrm>
+            <a:off x="6400800" y="3739896"/>
+            <a:ext cx="512064" cy="512064"/>
+          </a:xfrm>
+          <a:prstGeom prst="roundRect">
+            <a:avLst>
+              <a:gd name="adj" fmla="val 26000"/>
+            </a:avLst>
+          </a:prstGeom>
+          <a:solidFill>
+            <a:srgbClr val="EE0000"/>
+          </a:solidFill>
+          <a:ln>
+            <a:noFill/>
+          </a:ln>
+          <a:effectLst/>
+        </p:spPr>
+        <p:style>
+          <a:lnRef idx="1">
+            <a:schemeClr val="accent1"/>
+          </a:lnRef>
+          <a:fillRef idx="3">
+            <a:schemeClr val="accent1"/>
+          </a:fillRef>
+          <a:effectRef idx="2">
+            <a:schemeClr val="accent1"/>
+          </a:effectRef>
+          <a:fontRef idx="minor">
+            <a:schemeClr val="lt1"/>
+          </a:fontRef>
+        </p:style>
+        <p:txBody>
+          <a:bodyPr rtlCol="0" anchor="ctr"/>
+          <a:lstStyle/>
+          <a:p>
+            <a:pPr algn="ctr"/>
+          </a:p>
+        </p:txBody>
+      </p:sp>
       <p:pic>
         <p:nvPicPr>
-          <p:cNvPr id="17" name="Picture 16" descr="check_steel.png"/>
+          <p:cNvPr id="21" name="Picture 20" descr="check_white.png"/>
           <p:cNvPicPr>
             <a:picLocks noChangeAspect="1"/>
           </p:cNvPicPr>
@@ -6932,8 +7073,8 @@
         </p:blipFill>
         <p:spPr>
           <a:xfrm>
-            <a:off x="987552" y="4626864"/>
-            <a:ext cx="237744" cy="237744"/>
+            <a:off x="6523695" y="3862791"/>
+            <a:ext cx="266273" cy="266273"/>
           </a:xfrm>
           <a:prstGeom prst="rect">
             <a:avLst/>
@@ -6942,14 +7083,14 @@
       </p:pic>
       <p:sp>
         <p:nvSpPr>
-          <p:cNvPr id="18" name="TextBox 17"/>
+          <p:cNvPr id="22" name="TextBox 21"/>
           <p:cNvSpPr txBox="1"/>
           <p:nvPr/>
         </p:nvSpPr>
         <p:spPr>
           <a:xfrm>
-            <a:off x="1353312" y="4480560"/>
-            <a:ext cx="5029200" cy="530352"/>
+            <a:off x="7040880" y="3602736"/>
+            <a:ext cx="4206240" cy="786384"/>
           </a:xfrm>
           <a:prstGeom prst="rect">
             <a:avLst/>
@@ -6974,7 +7115,7 @@
               </a:spcAft>
             </a:pPr>
             <a:r>
-              <a:rPr sz="1200" b="0">
+              <a:rPr sz="1150" b="0">
                 <a:solidFill>
                   <a:srgbClr val="1A1A1A"/>
                 </a:solidFill>
@@ -6987,18 +7128,18 @@
       </p:sp>
       <p:sp>
         <p:nvSpPr>
-          <p:cNvPr id="19" name="Rounded Rectangle 18"/>
+          <p:cNvPr id="23" name="Rounded Rectangle 22"/>
           <p:cNvSpPr/>
           <p:nvPr/>
         </p:nvSpPr>
         <p:spPr>
           <a:xfrm>
-            <a:off x="841248" y="5084064"/>
-            <a:ext cx="5715000" cy="530352"/>
+            <a:off x="841248" y="4535424"/>
+            <a:ext cx="5138928" cy="786384"/>
           </a:xfrm>
           <a:prstGeom prst="roundRect">
             <a:avLst>
-              <a:gd name="adj" fmla="val 6000"/>
+              <a:gd name="adj" fmla="val 7000"/>
             </a:avLst>
           </a:prstGeom>
           <a:solidFill>
@@ -7033,9 +7174,55 @@
           </a:p>
         </p:txBody>
       </p:sp>
+      <p:sp>
+        <p:nvSpPr>
+          <p:cNvPr id="24" name="Rounded Rectangle 23"/>
+          <p:cNvSpPr/>
+          <p:nvPr/>
+        </p:nvSpPr>
+        <p:spPr>
+          <a:xfrm>
+            <a:off x="987552" y="4672584"/>
+            <a:ext cx="512064" cy="512064"/>
+          </a:xfrm>
+          <a:prstGeom prst="roundRect">
+            <a:avLst>
+              <a:gd name="adj" fmla="val 26000"/>
+            </a:avLst>
+          </a:prstGeom>
+          <a:solidFill>
+            <a:srgbClr val="EE0000"/>
+          </a:solidFill>
+          <a:ln>
+            <a:noFill/>
+          </a:ln>
+          <a:effectLst/>
+        </p:spPr>
+        <p:style>
+          <a:lnRef idx="1">
+            <a:schemeClr val="accent1"/>
+          </a:lnRef>
+          <a:fillRef idx="3">
+            <a:schemeClr val="accent1"/>
+          </a:fillRef>
+          <a:effectRef idx="2">
+            <a:schemeClr val="accent1"/>
+          </a:effectRef>
+          <a:fontRef idx="minor">
+            <a:schemeClr val="lt1"/>
+          </a:fontRef>
+        </p:style>
+        <p:txBody>
+          <a:bodyPr rtlCol="0" anchor="ctr"/>
+          <a:lstStyle/>
+          <a:p>
+            <a:pPr algn="ctr"/>
+          </a:p>
+        </p:txBody>
+      </p:sp>
       <p:pic>
         <p:nvPicPr>
-          <p:cNvPr id="20" name="Picture 19" descr="check_steel.png"/>
+          <p:cNvPr id="25" name="Picture 24" descr="check_white.png"/>
           <p:cNvPicPr>
             <a:picLocks noChangeAspect="1"/>
           </p:cNvPicPr>
@@ -7049,8 +7236,8 @@
         </p:blipFill>
         <p:spPr>
           <a:xfrm>
-            <a:off x="987552" y="5230368"/>
-            <a:ext cx="237744" cy="237744"/>
+            <a:off x="1110447" y="4795479"/>
+            <a:ext cx="266273" cy="266273"/>
           </a:xfrm>
           <a:prstGeom prst="rect">
             <a:avLst/>
@@ -7059,14 +7246,14 @@
       </p:pic>
       <p:sp>
         <p:nvSpPr>
-          <p:cNvPr id="21" name="TextBox 20"/>
+          <p:cNvPr id="26" name="TextBox 25"/>
           <p:cNvSpPr txBox="1"/>
           <p:nvPr/>
         </p:nvSpPr>
         <p:spPr>
           <a:xfrm>
-            <a:off x="1353312" y="5084064"/>
-            <a:ext cx="5029200" cy="530352"/>
+            <a:off x="1627632" y="4535424"/>
+            <a:ext cx="4206240" cy="786384"/>
           </a:xfrm>
           <a:prstGeom prst="rect">
             <a:avLst/>
@@ -7091,221 +7278,13 @@
               </a:spcAft>
             </a:pPr>
             <a:r>
-              <a:rPr sz="1200" b="0">
+              <a:rPr sz="1150" b="0">
                 <a:solidFill>
                   <a:srgbClr val="1A1A1A"/>
                 </a:solidFill>
                 <a:latin typeface="Red Hat Text"/>
               </a:rPr>
               <a:t>WaitForFirstConsumer: Pending is not broken</a:t>
-            </a:r>
-          </a:p>
-        </p:txBody>
-      </p:sp>
-      <p:sp>
-        <p:nvSpPr>
-          <p:cNvPr id="22" name="Rounded Rectangle 21"/>
-          <p:cNvSpPr/>
-          <p:nvPr/>
-        </p:nvSpPr>
-        <p:spPr>
-          <a:xfrm>
-            <a:off x="6812280" y="2670048"/>
-            <a:ext cx="4538167" cy="2944368"/>
-          </a:xfrm>
-          <a:prstGeom prst="roundRect">
-            <a:avLst>
-              <a:gd name="adj" fmla="val 4000"/>
-            </a:avLst>
-          </a:prstGeom>
-          <a:solidFill>
-            <a:srgbClr val="FFFFFF"/>
-          </a:solidFill>
-          <a:ln w="15240">
-            <a:solidFill>
-              <a:srgbClr val="DDE1E6"/>
-            </a:solidFill>
-          </a:ln>
-          <a:effectLst/>
-        </p:spPr>
-        <p:style>
-          <a:lnRef idx="1">
-            <a:schemeClr val="accent1"/>
-          </a:lnRef>
-          <a:fillRef idx="3">
-            <a:schemeClr val="accent1"/>
-          </a:fillRef>
-          <a:effectRef idx="2">
-            <a:schemeClr val="accent1"/>
-          </a:effectRef>
-          <a:fontRef idx="minor">
-            <a:schemeClr val="lt1"/>
-          </a:fontRef>
-        </p:style>
-        <p:txBody>
-          <a:bodyPr rtlCol="0" anchor="ctr"/>
-          <a:lstStyle/>
-          <a:p>
-            <a:pPr algn="ctr"/>
-          </a:p>
-        </p:txBody>
-      </p:sp>
-      <p:sp>
-        <p:nvSpPr>
-          <p:cNvPr id="23" name="Rounded Rectangle 22"/>
-          <p:cNvSpPr/>
-          <p:nvPr/>
-        </p:nvSpPr>
-        <p:spPr>
-          <a:xfrm>
-            <a:off x="7013448" y="2871216"/>
-            <a:ext cx="1298448" cy="310896"/>
-          </a:xfrm>
-          <a:prstGeom prst="roundRect">
-            <a:avLst>
-              <a:gd name="adj" fmla="val 50000"/>
-            </a:avLst>
-          </a:prstGeom>
-          <a:solidFill>
-            <a:srgbClr val="FCECEC"/>
-          </a:solidFill>
-          <a:ln>
-            <a:noFill/>
-          </a:ln>
-          <a:effectLst/>
-        </p:spPr>
-        <p:style>
-          <a:lnRef idx="1">
-            <a:schemeClr val="accent1"/>
-          </a:lnRef>
-          <a:fillRef idx="3">
-            <a:schemeClr val="accent1"/>
-          </a:fillRef>
-          <a:effectRef idx="2">
-            <a:schemeClr val="accent1"/>
-          </a:effectRef>
-          <a:fontRef idx="minor">
-            <a:schemeClr val="lt1"/>
-          </a:fontRef>
-        </p:style>
-        <p:txBody>
-          <a:bodyPr rtlCol="0" anchor="ctr"/>
-          <a:lstStyle/>
-          <a:p>
-            <a:pPr algn="ctr"/>
-          </a:p>
-        </p:txBody>
-      </p:sp>
-      <p:sp>
-        <p:nvSpPr>
-          <p:cNvPr id="24" name="TextBox 23"/>
-          <p:cNvSpPr txBox="1"/>
-          <p:nvPr/>
-        </p:nvSpPr>
-        <p:spPr>
-          <a:xfrm>
-            <a:off x="7013448" y="2871216"/>
-            <a:ext cx="1298448" cy="310896"/>
-          </a:xfrm>
-          <a:prstGeom prst="rect">
-            <a:avLst/>
-          </a:prstGeom>
-          <a:noFill/>
-        </p:spPr>
-        <p:txBody>
-          <a:bodyPr wrap="none" anchor="ctr" lIns="0" rIns="0" tIns="0" bIns="0">
-            <a:spAutoFit/>
-          </a:bodyPr>
-          <a:lstStyle/>
-          <a:p>
-            <a:pPr algn="ctr">
-              <a:lnSpc>
-                <a:spcPct val="106000"/>
-              </a:lnSpc>
-              <a:spcBef>
-                <a:spcPts val="0"/>
-              </a:spcBef>
-              <a:spcAft>
-                <a:spcPts val="0"/>
-              </a:spcAft>
-            </a:pPr>
-            <a:r>
-              <a:rPr sz="850" b="1">
-                <a:solidFill>
-                  <a:srgbClr val="B80000"/>
-                </a:solidFill>
-                <a:latin typeface="Red Hat Display"/>
-              </a:rPr>
-              <a:t>MEDIA PASS</a:t>
-            </a:r>
-          </a:p>
-        </p:txBody>
-      </p:sp>
-      <p:pic>
-        <p:nvPicPr>
-          <p:cNvPr id="25" name="Picture 24" descr="eye_slate.png"/>
-          <p:cNvPicPr>
-            <a:picLocks noChangeAspect="1"/>
-          </p:cNvPicPr>
-          <p:nvPr/>
-        </p:nvPicPr>
-        <p:blipFill>
-          <a:blip r:embed="rId4"/>
-          <a:stretch>
-            <a:fillRect/>
-          </a:stretch>
-        </p:blipFill>
-        <p:spPr>
-          <a:xfrm>
-            <a:off x="8843619" y="3383280"/>
-            <a:ext cx="475488" cy="475488"/>
-          </a:xfrm>
-          <a:prstGeom prst="rect">
-            <a:avLst/>
-          </a:prstGeom>
-        </p:spPr>
-      </p:pic>
-      <p:sp>
-        <p:nvSpPr>
-          <p:cNvPr id="26" name="TextBox 25"/>
-          <p:cNvSpPr txBox="1"/>
-          <p:nvPr/>
-        </p:nvSpPr>
-        <p:spPr>
-          <a:xfrm>
-            <a:off x="7050024" y="3995928"/>
-            <a:ext cx="4062679" cy="1481328"/>
-          </a:xfrm>
-          <a:prstGeom prst="rect">
-            <a:avLst/>
-          </a:prstGeom>
-          <a:noFill/>
-        </p:spPr>
-        <p:txBody>
-          <a:bodyPr wrap="square" anchor="t" lIns="0" rIns="0" tIns="0" bIns="0">
-            <a:spAutoFit/>
-          </a:bodyPr>
-          <a:lstStyle/>
-          <a:p>
-            <a:pPr algn="l">
-              <a:lnSpc>
-                <a:spcPct val="120000"/>
-              </a:lnSpc>
-              <a:spcBef>
-                <a:spcPts val="0"/>
-              </a:spcBef>
-              <a:spcAft>
-                <a:spcPts val="0"/>
-              </a:spcAft>
-            </a:pPr>
-            <a:r>
-              <a:rPr sz="950" b="0">
-                <a:solidFill>
-                  <a:srgbClr val="8A9099"/>
-                </a:solidFill>
-                <a:latin typeface="Red Hat Text"/>
-              </a:rPr>
-              <a:t>Two identical DB Pods side by side — one on emptyDir (restart → empty), one on a PVC (restart → intact).</a:t>
             </a:r>
           </a:p>
         </p:txBody>
@@ -7613,11 +7592,11 @@
         <p:spPr>
           <a:xfrm>
             <a:off x="841248" y="2395728"/>
-            <a:ext cx="5715000" cy="530352"/>
+            <a:ext cx="5138928" cy="786384"/>
           </a:xfrm>
           <a:prstGeom prst="roundRect">
             <a:avLst>
-              <a:gd name="adj" fmla="val 6000"/>
+              <a:gd name="adj" fmla="val 7000"/>
             </a:avLst>
           </a:prstGeom>
           <a:solidFill>
@@ -7652,9 +7631,55 @@
           </a:p>
         </p:txBody>
       </p:sp>
+      <p:sp>
+        <p:nvSpPr>
+          <p:cNvPr id="7" name="Rounded Rectangle 6"/>
+          <p:cNvSpPr/>
+          <p:nvPr/>
+        </p:nvSpPr>
+        <p:spPr>
+          <a:xfrm>
+            <a:off x="987552" y="2532888"/>
+            <a:ext cx="512064" cy="512064"/>
+          </a:xfrm>
+          <a:prstGeom prst="roundRect">
+            <a:avLst>
+              <a:gd name="adj" fmla="val 26000"/>
+            </a:avLst>
+          </a:prstGeom>
+          <a:solidFill>
+            <a:srgbClr val="EE0000"/>
+          </a:solidFill>
+          <a:ln>
+            <a:noFill/>
+          </a:ln>
+          <a:effectLst/>
+        </p:spPr>
+        <p:style>
+          <a:lnRef idx="1">
+            <a:schemeClr val="accent1"/>
+          </a:lnRef>
+          <a:fillRef idx="3">
+            <a:schemeClr val="accent1"/>
+          </a:fillRef>
+          <a:effectRef idx="2">
+            <a:schemeClr val="accent1"/>
+          </a:effectRef>
+          <a:fontRef idx="minor">
+            <a:schemeClr val="lt1"/>
+          </a:fontRef>
+        </p:style>
+        <p:txBody>
+          <a:bodyPr rtlCol="0" anchor="ctr"/>
+          <a:lstStyle/>
+          <a:p>
+            <a:pPr algn="ctr"/>
+          </a:p>
+        </p:txBody>
+      </p:sp>
       <p:pic>
         <p:nvPicPr>
-          <p:cNvPr id="7" name="Picture 6" descr="check_steel.png"/>
+          <p:cNvPr id="8" name="Picture 7" descr="check_white.png"/>
           <p:cNvPicPr>
             <a:picLocks noChangeAspect="1"/>
           </p:cNvPicPr>
@@ -7668,8 +7693,8 @@
         </p:blipFill>
         <p:spPr>
           <a:xfrm>
-            <a:off x="987552" y="2542032"/>
-            <a:ext cx="237744" cy="237744"/>
+            <a:off x="1110447" y="2655783"/>
+            <a:ext cx="266273" cy="266273"/>
           </a:xfrm>
           <a:prstGeom prst="rect">
             <a:avLst/>
@@ -7678,14 +7703,14 @@
       </p:pic>
       <p:sp>
         <p:nvSpPr>
-          <p:cNvPr id="8" name="TextBox 7"/>
+          <p:cNvPr id="9" name="TextBox 8"/>
           <p:cNvSpPr txBox="1"/>
           <p:nvPr/>
         </p:nvSpPr>
         <p:spPr>
           <a:xfrm>
-            <a:off x="1353312" y="2395728"/>
-            <a:ext cx="5029200" cy="530352"/>
+            <a:off x="1627632" y="2395728"/>
+            <a:ext cx="4206240" cy="786384"/>
           </a:xfrm>
           <a:prstGeom prst="rect">
             <a:avLst/>
@@ -7710,7 +7735,7 @@
               </a:spcAft>
             </a:pPr>
             <a:r>
-              <a:rPr sz="1200" b="0">
+              <a:rPr sz="1150" b="0">
                 <a:solidFill>
                   <a:srgbClr val="1A1A1A"/>
                 </a:solidFill>
@@ -7723,18 +7748,18 @@
       </p:sp>
       <p:sp>
         <p:nvSpPr>
-          <p:cNvPr id="9" name="Rounded Rectangle 8"/>
+          <p:cNvPr id="10" name="Rounded Rectangle 9"/>
           <p:cNvSpPr/>
           <p:nvPr/>
         </p:nvSpPr>
         <p:spPr>
           <a:xfrm>
-            <a:off x="841248" y="2999232"/>
-            <a:ext cx="5715000" cy="530352"/>
+            <a:off x="6254496" y="2395728"/>
+            <a:ext cx="5138928" cy="786384"/>
           </a:xfrm>
           <a:prstGeom prst="roundRect">
             <a:avLst>
-              <a:gd name="adj" fmla="val 6000"/>
+              <a:gd name="adj" fmla="val 7000"/>
             </a:avLst>
           </a:prstGeom>
           <a:solidFill>
@@ -7769,9 +7794,55 @@
           </a:p>
         </p:txBody>
       </p:sp>
+      <p:sp>
+        <p:nvSpPr>
+          <p:cNvPr id="11" name="Rounded Rectangle 10"/>
+          <p:cNvSpPr/>
+          <p:nvPr/>
+        </p:nvSpPr>
+        <p:spPr>
+          <a:xfrm>
+            <a:off x="6400800" y="2532888"/>
+            <a:ext cx="512064" cy="512064"/>
+          </a:xfrm>
+          <a:prstGeom prst="roundRect">
+            <a:avLst>
+              <a:gd name="adj" fmla="val 26000"/>
+            </a:avLst>
+          </a:prstGeom>
+          <a:solidFill>
+            <a:srgbClr val="EE0000"/>
+          </a:solidFill>
+          <a:ln>
+            <a:noFill/>
+          </a:ln>
+          <a:effectLst/>
+        </p:spPr>
+        <p:style>
+          <a:lnRef idx="1">
+            <a:schemeClr val="accent1"/>
+          </a:lnRef>
+          <a:fillRef idx="3">
+            <a:schemeClr val="accent1"/>
+          </a:fillRef>
+          <a:effectRef idx="2">
+            <a:schemeClr val="accent1"/>
+          </a:effectRef>
+          <a:fontRef idx="minor">
+            <a:schemeClr val="lt1"/>
+          </a:fontRef>
+        </p:style>
+        <p:txBody>
+          <a:bodyPr rtlCol="0" anchor="ctr"/>
+          <a:lstStyle/>
+          <a:p>
+            <a:pPr algn="ctr"/>
+          </a:p>
+        </p:txBody>
+      </p:sp>
       <p:pic>
         <p:nvPicPr>
-          <p:cNvPr id="10" name="Picture 9" descr="check_steel.png"/>
+          <p:cNvPr id="12" name="Picture 11" descr="check_white.png"/>
           <p:cNvPicPr>
             <a:picLocks noChangeAspect="1"/>
           </p:cNvPicPr>
@@ -7785,8 +7856,8 @@
         </p:blipFill>
         <p:spPr>
           <a:xfrm>
-            <a:off x="987552" y="3145536"/>
-            <a:ext cx="237744" cy="237744"/>
+            <a:off x="6523695" y="2655783"/>
+            <a:ext cx="266273" cy="266273"/>
           </a:xfrm>
           <a:prstGeom prst="rect">
             <a:avLst/>
@@ -7795,14 +7866,14 @@
       </p:pic>
       <p:sp>
         <p:nvSpPr>
-          <p:cNvPr id="11" name="TextBox 10"/>
+          <p:cNvPr id="13" name="TextBox 12"/>
           <p:cNvSpPr txBox="1"/>
           <p:nvPr/>
         </p:nvSpPr>
         <p:spPr>
           <a:xfrm>
-            <a:off x="1353312" y="2999232"/>
-            <a:ext cx="5029200" cy="530352"/>
+            <a:off x="7040880" y="2395728"/>
+            <a:ext cx="4206240" cy="786384"/>
           </a:xfrm>
           <a:prstGeom prst="rect">
             <a:avLst/>
@@ -7827,7 +7898,7 @@
               </a:spcAft>
             </a:pPr>
             <a:r>
-              <a:rPr sz="1200" b="0">
+              <a:rPr sz="1150" b="0">
                 <a:solidFill>
                   <a:srgbClr val="1A1A1A"/>
                 </a:solidFill>
@@ -7840,18 +7911,18 @@
       </p:sp>
       <p:sp>
         <p:nvSpPr>
-          <p:cNvPr id="12" name="Rounded Rectangle 11"/>
+          <p:cNvPr id="14" name="Rounded Rectangle 13"/>
           <p:cNvSpPr/>
           <p:nvPr/>
         </p:nvSpPr>
         <p:spPr>
           <a:xfrm>
-            <a:off x="841248" y="3602736"/>
-            <a:ext cx="5715000" cy="530352"/>
+            <a:off x="841248" y="3328416"/>
+            <a:ext cx="5138928" cy="786384"/>
           </a:xfrm>
           <a:prstGeom prst="roundRect">
             <a:avLst>
-              <a:gd name="adj" fmla="val 6000"/>
+              <a:gd name="adj" fmla="val 7000"/>
             </a:avLst>
           </a:prstGeom>
           <a:solidFill>
@@ -7886,9 +7957,55 @@
           </a:p>
         </p:txBody>
       </p:sp>
+      <p:sp>
+        <p:nvSpPr>
+          <p:cNvPr id="15" name="Rounded Rectangle 14"/>
+          <p:cNvSpPr/>
+          <p:nvPr/>
+        </p:nvSpPr>
+        <p:spPr>
+          <a:xfrm>
+            <a:off x="987552" y="3465576"/>
+            <a:ext cx="512064" cy="512064"/>
+          </a:xfrm>
+          <a:prstGeom prst="roundRect">
+            <a:avLst>
+              <a:gd name="adj" fmla="val 26000"/>
+            </a:avLst>
+          </a:prstGeom>
+          <a:solidFill>
+            <a:srgbClr val="EE0000"/>
+          </a:solidFill>
+          <a:ln>
+            <a:noFill/>
+          </a:ln>
+          <a:effectLst/>
+        </p:spPr>
+        <p:style>
+          <a:lnRef idx="1">
+            <a:schemeClr val="accent1"/>
+          </a:lnRef>
+          <a:fillRef idx="3">
+            <a:schemeClr val="accent1"/>
+          </a:fillRef>
+          <a:effectRef idx="2">
+            <a:schemeClr val="accent1"/>
+          </a:effectRef>
+          <a:fontRef idx="minor">
+            <a:schemeClr val="lt1"/>
+          </a:fontRef>
+        </p:style>
+        <p:txBody>
+          <a:bodyPr rtlCol="0" anchor="ctr"/>
+          <a:lstStyle/>
+          <a:p>
+            <a:pPr algn="ctr"/>
+          </a:p>
+        </p:txBody>
+      </p:sp>
       <p:pic>
         <p:nvPicPr>
-          <p:cNvPr id="13" name="Picture 12" descr="check_steel.png"/>
+          <p:cNvPr id="16" name="Picture 15" descr="check_white.png"/>
           <p:cNvPicPr>
             <a:picLocks noChangeAspect="1"/>
           </p:cNvPicPr>
@@ -7902,8 +8019,8 @@
         </p:blipFill>
         <p:spPr>
           <a:xfrm>
-            <a:off x="987552" y="3749040"/>
-            <a:ext cx="237744" cy="237744"/>
+            <a:off x="1110447" y="3588471"/>
+            <a:ext cx="266273" cy="266273"/>
           </a:xfrm>
           <a:prstGeom prst="rect">
             <a:avLst/>
@@ -7912,14 +8029,14 @@
       </p:pic>
       <p:sp>
         <p:nvSpPr>
-          <p:cNvPr id="14" name="TextBox 13"/>
+          <p:cNvPr id="17" name="TextBox 16"/>
           <p:cNvSpPr txBox="1"/>
           <p:nvPr/>
         </p:nvSpPr>
         <p:spPr>
           <a:xfrm>
-            <a:off x="1353312" y="3602736"/>
-            <a:ext cx="5029200" cy="530352"/>
+            <a:off x="1627632" y="3328416"/>
+            <a:ext cx="4206240" cy="786384"/>
           </a:xfrm>
           <a:prstGeom prst="rect">
             <a:avLst/>
@@ -7944,7 +8061,7 @@
               </a:spcAft>
             </a:pPr>
             <a:r>
-              <a:rPr sz="1200" b="0">
+              <a:rPr sz="1150" b="0">
                 <a:solidFill>
                   <a:srgbClr val="1A1A1A"/>
                 </a:solidFill>
@@ -7957,18 +8074,18 @@
       </p:sp>
       <p:sp>
         <p:nvSpPr>
-          <p:cNvPr id="15" name="Rounded Rectangle 14"/>
+          <p:cNvPr id="18" name="Rounded Rectangle 17"/>
           <p:cNvSpPr/>
           <p:nvPr/>
         </p:nvSpPr>
         <p:spPr>
           <a:xfrm>
-            <a:off x="841248" y="4206240"/>
-            <a:ext cx="5715000" cy="530352"/>
+            <a:off x="6254496" y="3328416"/>
+            <a:ext cx="5138928" cy="786384"/>
           </a:xfrm>
           <a:prstGeom prst="roundRect">
             <a:avLst>
-              <a:gd name="adj" fmla="val 6000"/>
+              <a:gd name="adj" fmla="val 7000"/>
             </a:avLst>
           </a:prstGeom>
           <a:solidFill>
@@ -8003,9 +8120,55 @@
           </a:p>
         </p:txBody>
       </p:sp>
+      <p:sp>
+        <p:nvSpPr>
+          <p:cNvPr id="19" name="Rounded Rectangle 18"/>
+          <p:cNvSpPr/>
+          <p:nvPr/>
+        </p:nvSpPr>
+        <p:spPr>
+          <a:xfrm>
+            <a:off x="6400800" y="3465576"/>
+            <a:ext cx="512064" cy="512064"/>
+          </a:xfrm>
+          <a:prstGeom prst="roundRect">
+            <a:avLst>
+              <a:gd name="adj" fmla="val 26000"/>
+            </a:avLst>
+          </a:prstGeom>
+          <a:solidFill>
+            <a:srgbClr val="EE0000"/>
+          </a:solidFill>
+          <a:ln>
+            <a:noFill/>
+          </a:ln>
+          <a:effectLst/>
+        </p:spPr>
+        <p:style>
+          <a:lnRef idx="1">
+            <a:schemeClr val="accent1"/>
+          </a:lnRef>
+          <a:fillRef idx="3">
+            <a:schemeClr val="accent1"/>
+          </a:fillRef>
+          <a:effectRef idx="2">
+            <a:schemeClr val="accent1"/>
+          </a:effectRef>
+          <a:fontRef idx="minor">
+            <a:schemeClr val="lt1"/>
+          </a:fontRef>
+        </p:style>
+        <p:txBody>
+          <a:bodyPr rtlCol="0" anchor="ctr"/>
+          <a:lstStyle/>
+          <a:p>
+            <a:pPr algn="ctr"/>
+          </a:p>
+        </p:txBody>
+      </p:sp>
       <p:pic>
         <p:nvPicPr>
-          <p:cNvPr id="16" name="Picture 15" descr="check_steel.png"/>
+          <p:cNvPr id="20" name="Picture 19" descr="check_white.png"/>
           <p:cNvPicPr>
             <a:picLocks noChangeAspect="1"/>
           </p:cNvPicPr>
@@ -8019,8 +8182,8 @@
         </p:blipFill>
         <p:spPr>
           <a:xfrm>
-            <a:off x="987552" y="4352544"/>
-            <a:ext cx="237744" cy="237744"/>
+            <a:off x="6523695" y="3588471"/>
+            <a:ext cx="266273" cy="266273"/>
           </a:xfrm>
           <a:prstGeom prst="rect">
             <a:avLst/>
@@ -8029,14 +8192,14 @@
       </p:pic>
       <p:sp>
         <p:nvSpPr>
-          <p:cNvPr id="17" name="TextBox 16"/>
+          <p:cNvPr id="21" name="TextBox 20"/>
           <p:cNvSpPr txBox="1"/>
           <p:nvPr/>
         </p:nvSpPr>
         <p:spPr>
           <a:xfrm>
-            <a:off x="1353312" y="4206240"/>
-            <a:ext cx="5029200" cy="530352"/>
+            <a:off x="7040880" y="3328416"/>
+            <a:ext cx="4206240" cy="786384"/>
           </a:xfrm>
           <a:prstGeom prst="rect">
             <a:avLst/>
@@ -8061,7 +8224,7 @@
               </a:spcAft>
             </a:pPr>
             <a:r>
-              <a:rPr sz="1200" b="0">
+              <a:rPr sz="1150" b="0">
                 <a:solidFill>
                   <a:srgbClr val="1A1A1A"/>
                 </a:solidFill>
@@ -8074,18 +8237,18 @@
       </p:sp>
       <p:sp>
         <p:nvSpPr>
-          <p:cNvPr id="18" name="Rounded Rectangle 17"/>
+          <p:cNvPr id="22" name="Rounded Rectangle 21"/>
           <p:cNvSpPr/>
           <p:nvPr/>
         </p:nvSpPr>
         <p:spPr>
           <a:xfrm>
-            <a:off x="841248" y="4809744"/>
-            <a:ext cx="5715000" cy="530352"/>
+            <a:off x="841248" y="4261104"/>
+            <a:ext cx="5138928" cy="786384"/>
           </a:xfrm>
           <a:prstGeom prst="roundRect">
             <a:avLst>
-              <a:gd name="adj" fmla="val 6000"/>
+              <a:gd name="adj" fmla="val 7000"/>
             </a:avLst>
           </a:prstGeom>
           <a:solidFill>
@@ -8120,9 +8283,55 @@
           </a:p>
         </p:txBody>
       </p:sp>
+      <p:sp>
+        <p:nvSpPr>
+          <p:cNvPr id="23" name="Rounded Rectangle 22"/>
+          <p:cNvSpPr/>
+          <p:nvPr/>
+        </p:nvSpPr>
+        <p:spPr>
+          <a:xfrm>
+            <a:off x="987552" y="4398264"/>
+            <a:ext cx="512064" cy="512064"/>
+          </a:xfrm>
+          <a:prstGeom prst="roundRect">
+            <a:avLst>
+              <a:gd name="adj" fmla="val 26000"/>
+            </a:avLst>
+          </a:prstGeom>
+          <a:solidFill>
+            <a:srgbClr val="EE0000"/>
+          </a:solidFill>
+          <a:ln>
+            <a:noFill/>
+          </a:ln>
+          <a:effectLst/>
+        </p:spPr>
+        <p:style>
+          <a:lnRef idx="1">
+            <a:schemeClr val="accent1"/>
+          </a:lnRef>
+          <a:fillRef idx="3">
+            <a:schemeClr val="accent1"/>
+          </a:fillRef>
+          <a:effectRef idx="2">
+            <a:schemeClr val="accent1"/>
+          </a:effectRef>
+          <a:fontRef idx="minor">
+            <a:schemeClr val="lt1"/>
+          </a:fontRef>
+        </p:style>
+        <p:txBody>
+          <a:bodyPr rtlCol="0" anchor="ctr"/>
+          <a:lstStyle/>
+          <a:p>
+            <a:pPr algn="ctr"/>
+          </a:p>
+        </p:txBody>
+      </p:sp>
       <p:pic>
         <p:nvPicPr>
-          <p:cNvPr id="19" name="Picture 18" descr="check_steel.png"/>
+          <p:cNvPr id="24" name="Picture 23" descr="check_white.png"/>
           <p:cNvPicPr>
             <a:picLocks noChangeAspect="1"/>
           </p:cNvPicPr>
@@ -8136,8 +8345,8 @@
         </p:blipFill>
         <p:spPr>
           <a:xfrm>
-            <a:off x="987552" y="4956048"/>
-            <a:ext cx="237744" cy="237744"/>
+            <a:off x="1110447" y="4521159"/>
+            <a:ext cx="266273" cy="266273"/>
           </a:xfrm>
           <a:prstGeom prst="rect">
             <a:avLst/>
@@ -8146,14 +8355,14 @@
       </p:pic>
       <p:sp>
         <p:nvSpPr>
-          <p:cNvPr id="20" name="TextBox 19"/>
+          <p:cNvPr id="25" name="TextBox 24"/>
           <p:cNvSpPr txBox="1"/>
           <p:nvPr/>
         </p:nvSpPr>
         <p:spPr>
           <a:xfrm>
-            <a:off x="1353312" y="4809744"/>
-            <a:ext cx="5029200" cy="530352"/>
+            <a:off x="1627632" y="4261104"/>
+            <a:ext cx="4206240" cy="786384"/>
           </a:xfrm>
           <a:prstGeom prst="rect">
             <a:avLst/>
@@ -8178,221 +8387,13 @@
               </a:spcAft>
             </a:pPr>
             <a:r>
-              <a:rPr sz="1200" b="0">
+              <a:rPr sz="1150" b="0">
                 <a:solidFill>
                   <a:srgbClr val="1A1A1A"/>
                 </a:solidFill>
                 <a:latin typeface="Red Hat Text"/>
               </a:rPr>
               <a:t>Read your StorageClasses, don't guess</a:t>
-            </a:r>
-          </a:p>
-        </p:txBody>
-      </p:sp>
-      <p:sp>
-        <p:nvSpPr>
-          <p:cNvPr id="21" name="Rounded Rectangle 20"/>
-          <p:cNvSpPr/>
-          <p:nvPr/>
-        </p:nvSpPr>
-        <p:spPr>
-          <a:xfrm>
-            <a:off x="6812280" y="2395728"/>
-            <a:ext cx="4538167" cy="2944368"/>
-          </a:xfrm>
-          <a:prstGeom prst="roundRect">
-            <a:avLst>
-              <a:gd name="adj" fmla="val 4000"/>
-            </a:avLst>
-          </a:prstGeom>
-          <a:solidFill>
-            <a:srgbClr val="FFFFFF"/>
-          </a:solidFill>
-          <a:ln w="15240">
-            <a:solidFill>
-              <a:srgbClr val="DDE1E6"/>
-            </a:solidFill>
-          </a:ln>
-          <a:effectLst/>
-        </p:spPr>
-        <p:style>
-          <a:lnRef idx="1">
-            <a:schemeClr val="accent1"/>
-          </a:lnRef>
-          <a:fillRef idx="3">
-            <a:schemeClr val="accent1"/>
-          </a:fillRef>
-          <a:effectRef idx="2">
-            <a:schemeClr val="accent1"/>
-          </a:effectRef>
-          <a:fontRef idx="minor">
-            <a:schemeClr val="lt1"/>
-          </a:fontRef>
-        </p:style>
-        <p:txBody>
-          <a:bodyPr rtlCol="0" anchor="ctr"/>
-          <a:lstStyle/>
-          <a:p>
-            <a:pPr algn="ctr"/>
-          </a:p>
-        </p:txBody>
-      </p:sp>
-      <p:sp>
-        <p:nvSpPr>
-          <p:cNvPr id="22" name="Rounded Rectangle 21"/>
-          <p:cNvSpPr/>
-          <p:nvPr/>
-        </p:nvSpPr>
-        <p:spPr>
-          <a:xfrm>
-            <a:off x="7013448" y="2596896"/>
-            <a:ext cx="1298448" cy="310896"/>
-          </a:xfrm>
-          <a:prstGeom prst="roundRect">
-            <a:avLst>
-              <a:gd name="adj" fmla="val 50000"/>
-            </a:avLst>
-          </a:prstGeom>
-          <a:solidFill>
-            <a:srgbClr val="FCECEC"/>
-          </a:solidFill>
-          <a:ln>
-            <a:noFill/>
-          </a:ln>
-          <a:effectLst/>
-        </p:spPr>
-        <p:style>
-          <a:lnRef idx="1">
-            <a:schemeClr val="accent1"/>
-          </a:lnRef>
-          <a:fillRef idx="3">
-            <a:schemeClr val="accent1"/>
-          </a:fillRef>
-          <a:effectRef idx="2">
-            <a:schemeClr val="accent1"/>
-          </a:effectRef>
-          <a:fontRef idx="minor">
-            <a:schemeClr val="lt1"/>
-          </a:fontRef>
-        </p:style>
-        <p:txBody>
-          <a:bodyPr rtlCol="0" anchor="ctr"/>
-          <a:lstStyle/>
-          <a:p>
-            <a:pPr algn="ctr"/>
-          </a:p>
-        </p:txBody>
-      </p:sp>
-      <p:sp>
-        <p:nvSpPr>
-          <p:cNvPr id="23" name="TextBox 22"/>
-          <p:cNvSpPr txBox="1"/>
-          <p:nvPr/>
-        </p:nvSpPr>
-        <p:spPr>
-          <a:xfrm>
-            <a:off x="7013448" y="2596896"/>
-            <a:ext cx="1298448" cy="310896"/>
-          </a:xfrm>
-          <a:prstGeom prst="rect">
-            <a:avLst/>
-          </a:prstGeom>
-          <a:noFill/>
-        </p:spPr>
-        <p:txBody>
-          <a:bodyPr wrap="none" anchor="ctr" lIns="0" rIns="0" tIns="0" bIns="0">
-            <a:spAutoFit/>
-          </a:bodyPr>
-          <a:lstStyle/>
-          <a:p>
-            <a:pPr algn="ctr">
-              <a:lnSpc>
-                <a:spcPct val="106000"/>
-              </a:lnSpc>
-              <a:spcBef>
-                <a:spcPts val="0"/>
-              </a:spcBef>
-              <a:spcAft>
-                <a:spcPts val="0"/>
-              </a:spcAft>
-            </a:pPr>
-            <a:r>
-              <a:rPr sz="850" b="1">
-                <a:solidFill>
-                  <a:srgbClr val="B80000"/>
-                </a:solidFill>
-                <a:latin typeface="Red Hat Display"/>
-              </a:rPr>
-              <a:t>MEDIA PASS</a:t>
-            </a:r>
-          </a:p>
-        </p:txBody>
-      </p:sp>
-      <p:pic>
-        <p:nvPicPr>
-          <p:cNvPr id="24" name="Picture 23" descr="eye_slate.png"/>
-          <p:cNvPicPr>
-            <a:picLocks noChangeAspect="1"/>
-          </p:cNvPicPr>
-          <p:nvPr/>
-        </p:nvPicPr>
-        <p:blipFill>
-          <a:blip r:embed="rId4"/>
-          <a:stretch>
-            <a:fillRect/>
-          </a:stretch>
-        </p:blipFill>
-        <p:spPr>
-          <a:xfrm>
-            <a:off x="8843619" y="3108960"/>
-            <a:ext cx="475488" cy="475488"/>
-          </a:xfrm>
-          <a:prstGeom prst="rect">
-            <a:avLst/>
-          </a:prstGeom>
-        </p:spPr>
-      </p:pic>
-      <p:sp>
-        <p:nvSpPr>
-          <p:cNvPr id="25" name="TextBox 24"/>
-          <p:cNvSpPr txBox="1"/>
-          <p:nvPr/>
-        </p:nvSpPr>
-        <p:spPr>
-          <a:xfrm>
-            <a:off x="7050024" y="3721608"/>
-            <a:ext cx="4062679" cy="1481328"/>
-          </a:xfrm>
-          <a:prstGeom prst="rect">
-            <a:avLst/>
-          </a:prstGeom>
-          <a:noFill/>
-        </p:spPr>
-        <p:txBody>
-          <a:bodyPr wrap="square" anchor="t" lIns="0" rIns="0" tIns="0" bIns="0">
-            <a:spAutoFit/>
-          </a:bodyPr>
-          <a:lstStyle/>
-          <a:p>
-            <a:pPr algn="l">
-              <a:lnSpc>
-                <a:spcPct val="120000"/>
-              </a:lnSpc>
-              <a:spcBef>
-                <a:spcPts val="0"/>
-              </a:spcBef>
-              <a:spcAft>
-                <a:spcPts val="0"/>
-              </a:spcAft>
-            </a:pPr>
-            <a:r>
-              <a:rPr sz="950" b="0">
-                <a:solidFill>
-                  <a:srgbClr val="8A9099"/>
-                </a:solidFill>
-                <a:latin typeface="Red Hat Text"/>
-              </a:rPr>
-              <a:t>RWO/RWX/ROX three-panel with node/Pod icons; a checklist "what does MY cluster support? → oc get sc".</a:t>
             </a:r>
           </a:p>
         </p:txBody>
@@ -8745,7 +8746,7 @@
         <p:spPr>
           <a:xfrm>
             <a:off x="841248" y="2670048"/>
-            <a:ext cx="5715000" cy="530352"/>
+            <a:ext cx="4160520" cy="475488"/>
           </a:xfrm>
           <a:prstGeom prst="roundRect">
             <a:avLst>
@@ -8800,8 +8801,8 @@
         </p:blipFill>
         <p:spPr>
           <a:xfrm>
-            <a:off x="987552" y="2816352"/>
-            <a:ext cx="237744" cy="237744"/>
+            <a:off x="969264" y="2807208"/>
+            <a:ext cx="201168" cy="201168"/>
           </a:xfrm>
           <a:prstGeom prst="rect">
             <a:avLst/>
@@ -8816,8 +8817,8 @@
         </p:nvSpPr>
         <p:spPr>
           <a:xfrm>
-            <a:off x="1353312" y="2670048"/>
-            <a:ext cx="5029200" cy="530352"/>
+            <a:off x="1280160" y="2670048"/>
+            <a:ext cx="3593591" cy="475488"/>
           </a:xfrm>
           <a:prstGeom prst="rect">
             <a:avLst/>
@@ -8842,7 +8843,7 @@
               </a:spcAft>
             </a:pPr>
             <a:r>
-              <a:rPr sz="1200" b="0">
+              <a:rPr sz="1050" b="0">
                 <a:solidFill>
                   <a:srgbClr val="1A1A1A"/>
                 </a:solidFill>
@@ -8861,8 +8862,8 @@
         </p:nvSpPr>
         <p:spPr>
           <a:xfrm>
-            <a:off x="841248" y="3273552"/>
-            <a:ext cx="5715000" cy="530352"/>
+            <a:off x="841248" y="3218688"/>
+            <a:ext cx="4160520" cy="475488"/>
           </a:xfrm>
           <a:prstGeom prst="roundRect">
             <a:avLst>
@@ -8917,8 +8918,8 @@
         </p:blipFill>
         <p:spPr>
           <a:xfrm>
-            <a:off x="987552" y="3419856"/>
-            <a:ext cx="237744" cy="237744"/>
+            <a:off x="969264" y="3355848"/>
+            <a:ext cx="201168" cy="201168"/>
           </a:xfrm>
           <a:prstGeom prst="rect">
             <a:avLst/>
@@ -8933,8 +8934,8 @@
         </p:nvSpPr>
         <p:spPr>
           <a:xfrm>
-            <a:off x="1353312" y="3273552"/>
-            <a:ext cx="5029200" cy="530352"/>
+            <a:off x="1280160" y="3218688"/>
+            <a:ext cx="3593591" cy="475488"/>
           </a:xfrm>
           <a:prstGeom prst="rect">
             <a:avLst/>
@@ -8959,7 +8960,7 @@
               </a:spcAft>
             </a:pPr>
             <a:r>
-              <a:rPr sz="1200" b="0">
+              <a:rPr sz="1050" b="0">
                 <a:solidFill>
                   <a:srgbClr val="1A1A1A"/>
                 </a:solidFill>
@@ -8978,8 +8979,8 @@
         </p:nvSpPr>
         <p:spPr>
           <a:xfrm>
-            <a:off x="841248" y="3877056"/>
-            <a:ext cx="5715000" cy="530352"/>
+            <a:off x="841248" y="3767328"/>
+            <a:ext cx="4160520" cy="475488"/>
           </a:xfrm>
           <a:prstGeom prst="roundRect">
             <a:avLst>
@@ -9034,8 +9035,8 @@
         </p:blipFill>
         <p:spPr>
           <a:xfrm>
-            <a:off x="987552" y="4023360"/>
-            <a:ext cx="237744" cy="237744"/>
+            <a:off x="969264" y="3904487"/>
+            <a:ext cx="201168" cy="201168"/>
           </a:xfrm>
           <a:prstGeom prst="rect">
             <a:avLst/>
@@ -9050,8 +9051,8 @@
         </p:nvSpPr>
         <p:spPr>
           <a:xfrm>
-            <a:off x="1353312" y="3877056"/>
-            <a:ext cx="5029200" cy="530352"/>
+            <a:off x="1280160" y="3767328"/>
+            <a:ext cx="3593591" cy="475488"/>
           </a:xfrm>
           <a:prstGeom prst="rect">
             <a:avLst/>
@@ -9076,7 +9077,7 @@
               </a:spcAft>
             </a:pPr>
             <a:r>
-              <a:rPr sz="1200" b="0">
+              <a:rPr sz="1050" b="0">
                 <a:solidFill>
                   <a:srgbClr val="1A1A1A"/>
                 </a:solidFill>
@@ -9095,8 +9096,8 @@
         </p:nvSpPr>
         <p:spPr>
           <a:xfrm>
-            <a:off x="841248" y="4480560"/>
-            <a:ext cx="5715000" cy="530352"/>
+            <a:off x="841248" y="4315968"/>
+            <a:ext cx="4160520" cy="475488"/>
           </a:xfrm>
           <a:prstGeom prst="roundRect">
             <a:avLst>
@@ -9151,8 +9152,8 @@
         </p:blipFill>
         <p:spPr>
           <a:xfrm>
-            <a:off x="987552" y="4626864"/>
-            <a:ext cx="237744" cy="237744"/>
+            <a:off x="969264" y="4453127"/>
+            <a:ext cx="201168" cy="201168"/>
           </a:xfrm>
           <a:prstGeom prst="rect">
             <a:avLst/>
@@ -9167,8 +9168,8 @@
         </p:nvSpPr>
         <p:spPr>
           <a:xfrm>
-            <a:off x="1353312" y="4480560"/>
-            <a:ext cx="5029200" cy="530352"/>
+            <a:off x="1280160" y="4315968"/>
+            <a:ext cx="3593591" cy="475488"/>
           </a:xfrm>
           <a:prstGeom prst="rect">
             <a:avLst/>
@@ -9193,7 +9194,7 @@
               </a:spcAft>
             </a:pPr>
             <a:r>
-              <a:rPr sz="1200" b="0">
+              <a:rPr sz="1050" b="0">
                 <a:solidFill>
                   <a:srgbClr val="1A1A1A"/>
                 </a:solidFill>
@@ -9212,8 +9213,8 @@
         </p:nvSpPr>
         <p:spPr>
           <a:xfrm>
-            <a:off x="841248" y="5084064"/>
-            <a:ext cx="5715000" cy="530352"/>
+            <a:off x="841248" y="4864607"/>
+            <a:ext cx="4160520" cy="475488"/>
           </a:xfrm>
           <a:prstGeom prst="roundRect">
             <a:avLst>
@@ -9268,8 +9269,8 @@
         </p:blipFill>
         <p:spPr>
           <a:xfrm>
-            <a:off x="987552" y="5230368"/>
-            <a:ext cx="237744" cy="237744"/>
+            <a:off x="969264" y="5001767"/>
+            <a:ext cx="201168" cy="201168"/>
           </a:xfrm>
           <a:prstGeom prst="rect">
             <a:avLst/>
@@ -9284,8 +9285,8 @@
         </p:nvSpPr>
         <p:spPr>
           <a:xfrm>
-            <a:off x="1353312" y="5084064"/>
-            <a:ext cx="5029200" cy="530352"/>
+            <a:off x="1280160" y="4864607"/>
+            <a:ext cx="3593591" cy="475488"/>
           </a:xfrm>
           <a:prstGeom prst="rect">
             <a:avLst/>
@@ -9310,7 +9311,7 @@
               </a:spcAft>
             </a:pPr>
             <a:r>
-              <a:rPr sz="1200" b="0">
+              <a:rPr sz="1050" b="0">
                 <a:solidFill>
                   <a:srgbClr val="1A1A1A"/>
                 </a:solidFill>
@@ -9329,8 +9330,8 @@
         </p:nvSpPr>
         <p:spPr>
           <a:xfrm>
-            <a:off x="6812280" y="2670048"/>
-            <a:ext cx="4538167" cy="2944368"/>
+            <a:off x="5385816" y="2670048"/>
+            <a:ext cx="5964631" cy="2749303"/>
           </a:xfrm>
           <a:prstGeom prst="roundRect">
             <a:avLst>
@@ -9369,100 +9370,9 @@
           </a:p>
         </p:txBody>
       </p:sp>
-      <p:sp>
-        <p:nvSpPr>
-          <p:cNvPr id="23" name="Rounded Rectangle 22"/>
-          <p:cNvSpPr/>
-          <p:nvPr/>
-        </p:nvSpPr>
-        <p:spPr>
-          <a:xfrm>
-            <a:off x="7013448" y="2871216"/>
-            <a:ext cx="1298448" cy="310896"/>
-          </a:xfrm>
-          <a:prstGeom prst="roundRect">
-            <a:avLst>
-              <a:gd name="adj" fmla="val 50000"/>
-            </a:avLst>
-          </a:prstGeom>
-          <a:solidFill>
-            <a:srgbClr val="FCECEC"/>
-          </a:solidFill>
-          <a:ln>
-            <a:noFill/>
-          </a:ln>
-          <a:effectLst/>
-        </p:spPr>
-        <p:style>
-          <a:lnRef idx="1">
-            <a:schemeClr val="accent1"/>
-          </a:lnRef>
-          <a:fillRef idx="3">
-            <a:schemeClr val="accent1"/>
-          </a:fillRef>
-          <a:effectRef idx="2">
-            <a:schemeClr val="accent1"/>
-          </a:effectRef>
-          <a:fontRef idx="minor">
-            <a:schemeClr val="lt1"/>
-          </a:fontRef>
-        </p:style>
-        <p:txBody>
-          <a:bodyPr rtlCol="0" anchor="ctr"/>
-          <a:lstStyle/>
-          <a:p>
-            <a:pPr algn="ctr"/>
-          </a:p>
-        </p:txBody>
-      </p:sp>
-      <p:sp>
-        <p:nvSpPr>
-          <p:cNvPr id="24" name="TextBox 23"/>
-          <p:cNvSpPr txBox="1"/>
-          <p:nvPr/>
-        </p:nvSpPr>
-        <p:spPr>
-          <a:xfrm>
-            <a:off x="7013448" y="2871216"/>
-            <a:ext cx="1298448" cy="310896"/>
-          </a:xfrm>
-          <a:prstGeom prst="rect">
-            <a:avLst/>
-          </a:prstGeom>
-          <a:noFill/>
-        </p:spPr>
-        <p:txBody>
-          <a:bodyPr wrap="none" anchor="ctr" lIns="0" rIns="0" tIns="0" bIns="0">
-            <a:spAutoFit/>
-          </a:bodyPr>
-          <a:lstStyle/>
-          <a:p>
-            <a:pPr algn="ctr">
-              <a:lnSpc>
-                <a:spcPct val="106000"/>
-              </a:lnSpc>
-              <a:spcBef>
-                <a:spcPts val="0"/>
-              </a:spcBef>
-              <a:spcAft>
-                <a:spcPts val="0"/>
-              </a:spcAft>
-            </a:pPr>
-            <a:r>
-              <a:rPr sz="850" b="1">
-                <a:solidFill>
-                  <a:srgbClr val="B80000"/>
-                </a:solidFill>
-                <a:latin typeface="Red Hat Display"/>
-              </a:rPr>
-              <a:t>MEDIA PASS</a:t>
-            </a:r>
-          </a:p>
-        </p:txBody>
-      </p:sp>
       <p:pic>
         <p:nvPicPr>
-          <p:cNvPr id="25" name="Picture 24" descr="eye_slate.png"/>
+          <p:cNvPr id="23" name="Picture 22" descr="02-sts-vs-deployment.png"/>
           <p:cNvPicPr>
             <a:picLocks noChangeAspect="1"/>
           </p:cNvPicPr>
@@ -9476,62 +9386,17 @@
         </p:blipFill>
         <p:spPr>
           <a:xfrm>
-            <a:off x="8843619" y="3383280"/>
-            <a:ext cx="475488" cy="475488"/>
+            <a:off x="5532120" y="2816352"/>
+            <a:ext cx="5672023" cy="2456695"/>
           </a:xfrm>
           <a:prstGeom prst="rect">
             <a:avLst/>
           </a:prstGeom>
         </p:spPr>
       </p:pic>
-      <p:sp>
-        <p:nvSpPr>
-          <p:cNvPr id="26" name="TextBox 25"/>
-          <p:cNvSpPr txBox="1"/>
-          <p:nvPr/>
-        </p:nvSpPr>
-        <p:spPr>
-          <a:xfrm>
-            <a:off x="7050024" y="3995928"/>
-            <a:ext cx="4062679" cy="1481328"/>
-          </a:xfrm>
-          <a:prstGeom prst="rect">
-            <a:avLst/>
-          </a:prstGeom>
-          <a:noFill/>
-        </p:spPr>
-        <p:txBody>
-          <a:bodyPr wrap="square" anchor="t" lIns="0" rIns="0" tIns="0" bIns="0">
-            <a:spAutoFit/>
-          </a:bodyPr>
-          <a:lstStyle/>
-          <a:p>
-            <a:pPr algn="l">
-              <a:lnSpc>
-                <a:spcPct val="120000"/>
-              </a:lnSpc>
-              <a:spcBef>
-                <a:spcPts val="0"/>
-              </a:spcBef>
-              <a:spcAft>
-                <a:spcPts val="0"/>
-              </a:spcAft>
-            </a:pPr>
-            <a:r>
-              <a:rPr sz="950" b="0">
-                <a:solidFill>
-                  <a:srgbClr val="8A9099"/>
-                </a:solidFill>
-                <a:latin typeface="Red Hat Text"/>
-              </a:rPr>
-              <a:t>Reuse concept diagram storage-stateful-...-02-sts-vs-deployment.svg — Deployment (shared Service, random Pods) vs StatefulSet (headless Service, pg-sts-0/1 each with its own PVC).</a:t>
-            </a:r>
-          </a:p>
-        </p:txBody>
-      </p:sp>
       <p:cxnSp>
         <p:nvCxnSpPr>
-          <p:cNvPr id="27" name="Connector 26"/>
+          <p:cNvPr id="24" name="Connector 23"/>
           <p:cNvCxnSpPr/>
           <p:nvPr/>
         </p:nvCxnSpPr>
@@ -9567,7 +9432,7 @@
       </p:cxnSp>
       <p:sp>
         <p:nvSpPr>
-          <p:cNvPr id="28" name="TextBox 27"/>
+          <p:cNvPr id="25" name="TextBox 24"/>
           <p:cNvSpPr txBox="1"/>
           <p:nvPr/>
         </p:nvSpPr>
@@ -9612,7 +9477,7 @@
       </p:sp>
       <p:sp>
         <p:nvSpPr>
-          <p:cNvPr id="29" name="TextBox 28"/>
+          <p:cNvPr id="26" name="TextBox 25"/>
           <p:cNvSpPr txBox="1"/>
           <p:nvPr/>
         </p:nvSpPr>
@@ -9832,11 +9697,11 @@
         <p:spPr>
           <a:xfrm>
             <a:off x="841248" y="2395728"/>
-            <a:ext cx="5715000" cy="530352"/>
+            <a:ext cx="5138928" cy="786384"/>
           </a:xfrm>
           <a:prstGeom prst="roundRect">
             <a:avLst>
-              <a:gd name="adj" fmla="val 6000"/>
+              <a:gd name="adj" fmla="val 7000"/>
             </a:avLst>
           </a:prstGeom>
           <a:solidFill>
@@ -9871,9 +9736,55 @@
           </a:p>
         </p:txBody>
       </p:sp>
+      <p:sp>
+        <p:nvSpPr>
+          <p:cNvPr id="7" name="Rounded Rectangle 6"/>
+          <p:cNvSpPr/>
+          <p:nvPr/>
+        </p:nvSpPr>
+        <p:spPr>
+          <a:xfrm>
+            <a:off x="987552" y="2532888"/>
+            <a:ext cx="512064" cy="512064"/>
+          </a:xfrm>
+          <a:prstGeom prst="roundRect">
+            <a:avLst>
+              <a:gd name="adj" fmla="val 26000"/>
+            </a:avLst>
+          </a:prstGeom>
+          <a:solidFill>
+            <a:srgbClr val="EE0000"/>
+          </a:solidFill>
+          <a:ln>
+            <a:noFill/>
+          </a:ln>
+          <a:effectLst/>
+        </p:spPr>
+        <p:style>
+          <a:lnRef idx="1">
+            <a:schemeClr val="accent1"/>
+          </a:lnRef>
+          <a:fillRef idx="3">
+            <a:schemeClr val="accent1"/>
+          </a:fillRef>
+          <a:effectRef idx="2">
+            <a:schemeClr val="accent1"/>
+          </a:effectRef>
+          <a:fontRef idx="minor">
+            <a:schemeClr val="lt1"/>
+          </a:fontRef>
+        </p:style>
+        <p:txBody>
+          <a:bodyPr rtlCol="0" anchor="ctr"/>
+          <a:lstStyle/>
+          <a:p>
+            <a:pPr algn="ctr"/>
+          </a:p>
+        </p:txBody>
+      </p:sp>
       <p:pic>
         <p:nvPicPr>
-          <p:cNvPr id="7" name="Picture 6" descr="check_steel.png"/>
+          <p:cNvPr id="8" name="Picture 7" descr="check_white.png"/>
           <p:cNvPicPr>
             <a:picLocks noChangeAspect="1"/>
           </p:cNvPicPr>
@@ -9887,8 +9798,8 @@
         </p:blipFill>
         <p:spPr>
           <a:xfrm>
-            <a:off x="987552" y="2542032"/>
-            <a:ext cx="237744" cy="237744"/>
+            <a:off x="1110447" y="2655783"/>
+            <a:ext cx="266273" cy="266273"/>
           </a:xfrm>
           <a:prstGeom prst="rect">
             <a:avLst/>
@@ -9897,14 +9808,14 @@
       </p:pic>
       <p:sp>
         <p:nvSpPr>
-          <p:cNvPr id="8" name="TextBox 7"/>
+          <p:cNvPr id="9" name="TextBox 8"/>
           <p:cNvSpPr txBox="1"/>
           <p:nvPr/>
         </p:nvSpPr>
         <p:spPr>
           <a:xfrm>
-            <a:off x="1353312" y="2395728"/>
-            <a:ext cx="5029200" cy="530352"/>
+            <a:off x="1627632" y="2395728"/>
+            <a:ext cx="4206240" cy="786384"/>
           </a:xfrm>
           <a:prstGeom prst="rect">
             <a:avLst/>
@@ -9929,7 +9840,7 @@
               </a:spcAft>
             </a:pPr>
             <a:r>
-              <a:rPr sz="1200" b="0">
+              <a:rPr sz="1150" b="0">
                 <a:solidFill>
                   <a:srgbClr val="1A1A1A"/>
                 </a:solidFill>
@@ -9942,18 +9853,18 @@
       </p:sp>
       <p:sp>
         <p:nvSpPr>
-          <p:cNvPr id="9" name="Rounded Rectangle 8"/>
+          <p:cNvPr id="10" name="Rounded Rectangle 9"/>
           <p:cNvSpPr/>
           <p:nvPr/>
         </p:nvSpPr>
         <p:spPr>
           <a:xfrm>
-            <a:off x="841248" y="2999232"/>
-            <a:ext cx="5715000" cy="530352"/>
+            <a:off x="6254496" y="2395728"/>
+            <a:ext cx="5138928" cy="786384"/>
           </a:xfrm>
           <a:prstGeom prst="roundRect">
             <a:avLst>
-              <a:gd name="adj" fmla="val 6000"/>
+              <a:gd name="adj" fmla="val 7000"/>
             </a:avLst>
           </a:prstGeom>
           <a:solidFill>
@@ -9988,9 +9899,55 @@
           </a:p>
         </p:txBody>
       </p:sp>
+      <p:sp>
+        <p:nvSpPr>
+          <p:cNvPr id="11" name="Rounded Rectangle 10"/>
+          <p:cNvSpPr/>
+          <p:nvPr/>
+        </p:nvSpPr>
+        <p:spPr>
+          <a:xfrm>
+            <a:off x="6400800" y="2532888"/>
+            <a:ext cx="512064" cy="512064"/>
+          </a:xfrm>
+          <a:prstGeom prst="roundRect">
+            <a:avLst>
+              <a:gd name="adj" fmla="val 26000"/>
+            </a:avLst>
+          </a:prstGeom>
+          <a:solidFill>
+            <a:srgbClr val="EE0000"/>
+          </a:solidFill>
+          <a:ln>
+            <a:noFill/>
+          </a:ln>
+          <a:effectLst/>
+        </p:spPr>
+        <p:style>
+          <a:lnRef idx="1">
+            <a:schemeClr val="accent1"/>
+          </a:lnRef>
+          <a:fillRef idx="3">
+            <a:schemeClr val="accent1"/>
+          </a:fillRef>
+          <a:effectRef idx="2">
+            <a:schemeClr val="accent1"/>
+          </a:effectRef>
+          <a:fontRef idx="minor">
+            <a:schemeClr val="lt1"/>
+          </a:fontRef>
+        </p:style>
+        <p:txBody>
+          <a:bodyPr rtlCol="0" anchor="ctr"/>
+          <a:lstStyle/>
+          <a:p>
+            <a:pPr algn="ctr"/>
+          </a:p>
+        </p:txBody>
+      </p:sp>
       <p:pic>
         <p:nvPicPr>
-          <p:cNvPr id="10" name="Picture 9" descr="check_steel.png"/>
+          <p:cNvPr id="12" name="Picture 11" descr="check_white.png"/>
           <p:cNvPicPr>
             <a:picLocks noChangeAspect="1"/>
           </p:cNvPicPr>
@@ -10004,8 +9961,8 @@
         </p:blipFill>
         <p:spPr>
           <a:xfrm>
-            <a:off x="987552" y="3145536"/>
-            <a:ext cx="237744" cy="237744"/>
+            <a:off x="6523695" y="2655783"/>
+            <a:ext cx="266273" cy="266273"/>
           </a:xfrm>
           <a:prstGeom prst="rect">
             <a:avLst/>
@@ -10014,14 +9971,14 @@
       </p:pic>
       <p:sp>
         <p:nvSpPr>
-          <p:cNvPr id="11" name="TextBox 10"/>
+          <p:cNvPr id="13" name="TextBox 12"/>
           <p:cNvSpPr txBox="1"/>
           <p:nvPr/>
         </p:nvSpPr>
         <p:spPr>
           <a:xfrm>
-            <a:off x="1353312" y="2999232"/>
-            <a:ext cx="5029200" cy="530352"/>
+            <a:off x="7040880" y="2395728"/>
+            <a:ext cx="4206240" cy="786384"/>
           </a:xfrm>
           <a:prstGeom prst="rect">
             <a:avLst/>
@@ -10046,7 +10003,7 @@
               </a:spcAft>
             </a:pPr>
             <a:r>
-              <a:rPr sz="1200" b="0">
+              <a:rPr sz="1150" b="0">
                 <a:solidFill>
                   <a:srgbClr val="1A1A1A"/>
                 </a:solidFill>
@@ -10059,18 +10016,18 @@
       </p:sp>
       <p:sp>
         <p:nvSpPr>
-          <p:cNvPr id="12" name="Rounded Rectangle 11"/>
+          <p:cNvPr id="14" name="Rounded Rectangle 13"/>
           <p:cNvSpPr/>
           <p:nvPr/>
         </p:nvSpPr>
         <p:spPr>
           <a:xfrm>
-            <a:off x="841248" y="3602736"/>
-            <a:ext cx="5715000" cy="530352"/>
+            <a:off x="841248" y="3328416"/>
+            <a:ext cx="5138928" cy="786384"/>
           </a:xfrm>
           <a:prstGeom prst="roundRect">
             <a:avLst>
-              <a:gd name="adj" fmla="val 6000"/>
+              <a:gd name="adj" fmla="val 7000"/>
             </a:avLst>
           </a:prstGeom>
           <a:solidFill>
@@ -10105,9 +10062,55 @@
           </a:p>
         </p:txBody>
       </p:sp>
+      <p:sp>
+        <p:nvSpPr>
+          <p:cNvPr id="15" name="Rounded Rectangle 14"/>
+          <p:cNvSpPr/>
+          <p:nvPr/>
+        </p:nvSpPr>
+        <p:spPr>
+          <a:xfrm>
+            <a:off x="987552" y="3465576"/>
+            <a:ext cx="512064" cy="512064"/>
+          </a:xfrm>
+          <a:prstGeom prst="roundRect">
+            <a:avLst>
+              <a:gd name="adj" fmla="val 26000"/>
+            </a:avLst>
+          </a:prstGeom>
+          <a:solidFill>
+            <a:srgbClr val="EE0000"/>
+          </a:solidFill>
+          <a:ln>
+            <a:noFill/>
+          </a:ln>
+          <a:effectLst/>
+        </p:spPr>
+        <p:style>
+          <a:lnRef idx="1">
+            <a:schemeClr val="accent1"/>
+          </a:lnRef>
+          <a:fillRef idx="3">
+            <a:schemeClr val="accent1"/>
+          </a:fillRef>
+          <a:effectRef idx="2">
+            <a:schemeClr val="accent1"/>
+          </a:effectRef>
+          <a:fontRef idx="minor">
+            <a:schemeClr val="lt1"/>
+          </a:fontRef>
+        </p:style>
+        <p:txBody>
+          <a:bodyPr rtlCol="0" anchor="ctr"/>
+          <a:lstStyle/>
+          <a:p>
+            <a:pPr algn="ctr"/>
+          </a:p>
+        </p:txBody>
+      </p:sp>
       <p:pic>
         <p:nvPicPr>
-          <p:cNvPr id="13" name="Picture 12" descr="check_steel.png"/>
+          <p:cNvPr id="16" name="Picture 15" descr="check_white.png"/>
           <p:cNvPicPr>
             <a:picLocks noChangeAspect="1"/>
           </p:cNvPicPr>
@@ -10121,8 +10124,8 @@
         </p:blipFill>
         <p:spPr>
           <a:xfrm>
-            <a:off x="987552" y="3749040"/>
-            <a:ext cx="237744" cy="237744"/>
+            <a:off x="1110447" y="3588471"/>
+            <a:ext cx="266273" cy="266273"/>
           </a:xfrm>
           <a:prstGeom prst="rect">
             <a:avLst/>
@@ -10131,14 +10134,14 @@
       </p:pic>
       <p:sp>
         <p:nvSpPr>
-          <p:cNvPr id="14" name="TextBox 13"/>
+          <p:cNvPr id="17" name="TextBox 16"/>
           <p:cNvSpPr txBox="1"/>
           <p:nvPr/>
         </p:nvSpPr>
         <p:spPr>
           <a:xfrm>
-            <a:off x="1353312" y="3602736"/>
-            <a:ext cx="5029200" cy="530352"/>
+            <a:off x="1627632" y="3328416"/>
+            <a:ext cx="4206240" cy="786384"/>
           </a:xfrm>
           <a:prstGeom prst="rect">
             <a:avLst/>
@@ -10163,7 +10166,7 @@
               </a:spcAft>
             </a:pPr>
             <a:r>
-              <a:rPr sz="1200" b="0">
+              <a:rPr sz="1150" b="0">
                 <a:solidFill>
                   <a:srgbClr val="1A1A1A"/>
                 </a:solidFill>
@@ -10176,18 +10179,18 @@
       </p:sp>
       <p:sp>
         <p:nvSpPr>
-          <p:cNvPr id="15" name="Rounded Rectangle 14"/>
+          <p:cNvPr id="18" name="Rounded Rectangle 17"/>
           <p:cNvSpPr/>
           <p:nvPr/>
         </p:nvSpPr>
         <p:spPr>
           <a:xfrm>
-            <a:off x="841248" y="4206240"/>
-            <a:ext cx="5715000" cy="530352"/>
+            <a:off x="6254496" y="3328416"/>
+            <a:ext cx="5138928" cy="786384"/>
           </a:xfrm>
           <a:prstGeom prst="roundRect">
             <a:avLst>
-              <a:gd name="adj" fmla="val 6000"/>
+              <a:gd name="adj" fmla="val 7000"/>
             </a:avLst>
           </a:prstGeom>
           <a:solidFill>
@@ -10222,9 +10225,55 @@
           </a:p>
         </p:txBody>
       </p:sp>
+      <p:sp>
+        <p:nvSpPr>
+          <p:cNvPr id="19" name="Rounded Rectangle 18"/>
+          <p:cNvSpPr/>
+          <p:nvPr/>
+        </p:nvSpPr>
+        <p:spPr>
+          <a:xfrm>
+            <a:off x="6400800" y="3465576"/>
+            <a:ext cx="512064" cy="512064"/>
+          </a:xfrm>
+          <a:prstGeom prst="roundRect">
+            <a:avLst>
+              <a:gd name="adj" fmla="val 26000"/>
+            </a:avLst>
+          </a:prstGeom>
+          <a:solidFill>
+            <a:srgbClr val="EE0000"/>
+          </a:solidFill>
+          <a:ln>
+            <a:noFill/>
+          </a:ln>
+          <a:effectLst/>
+        </p:spPr>
+        <p:style>
+          <a:lnRef idx="1">
+            <a:schemeClr val="accent1"/>
+          </a:lnRef>
+          <a:fillRef idx="3">
+            <a:schemeClr val="accent1"/>
+          </a:fillRef>
+          <a:effectRef idx="2">
+            <a:schemeClr val="accent1"/>
+          </a:effectRef>
+          <a:fontRef idx="minor">
+            <a:schemeClr val="lt1"/>
+          </a:fontRef>
+        </p:style>
+        <p:txBody>
+          <a:bodyPr rtlCol="0" anchor="ctr"/>
+          <a:lstStyle/>
+          <a:p>
+            <a:pPr algn="ctr"/>
+          </a:p>
+        </p:txBody>
+      </p:sp>
       <p:pic>
         <p:nvPicPr>
-          <p:cNvPr id="16" name="Picture 15" descr="check_steel.png"/>
+          <p:cNvPr id="20" name="Picture 19" descr="check_white.png"/>
           <p:cNvPicPr>
             <a:picLocks noChangeAspect="1"/>
           </p:cNvPicPr>
@@ -10238,8 +10287,8 @@
         </p:blipFill>
         <p:spPr>
           <a:xfrm>
-            <a:off x="987552" y="4352544"/>
-            <a:ext cx="237744" cy="237744"/>
+            <a:off x="6523695" y="3588471"/>
+            <a:ext cx="266273" cy="266273"/>
           </a:xfrm>
           <a:prstGeom prst="rect">
             <a:avLst/>
@@ -10248,14 +10297,14 @@
       </p:pic>
       <p:sp>
         <p:nvSpPr>
-          <p:cNvPr id="17" name="TextBox 16"/>
+          <p:cNvPr id="21" name="TextBox 20"/>
           <p:cNvSpPr txBox="1"/>
           <p:nvPr/>
         </p:nvSpPr>
         <p:spPr>
           <a:xfrm>
-            <a:off x="1353312" y="4206240"/>
-            <a:ext cx="5029200" cy="530352"/>
+            <a:off x="7040880" y="3328416"/>
+            <a:ext cx="4206240" cy="786384"/>
           </a:xfrm>
           <a:prstGeom prst="rect">
             <a:avLst/>
@@ -10280,7 +10329,7 @@
               </a:spcAft>
             </a:pPr>
             <a:r>
-              <a:rPr sz="1200" b="0">
+              <a:rPr sz="1150" b="0">
                 <a:solidFill>
                   <a:srgbClr val="1A1A1A"/>
                 </a:solidFill>
@@ -10293,18 +10342,18 @@
       </p:sp>
       <p:sp>
         <p:nvSpPr>
-          <p:cNvPr id="18" name="Rounded Rectangle 17"/>
+          <p:cNvPr id="22" name="Rounded Rectangle 21"/>
           <p:cNvSpPr/>
           <p:nvPr/>
         </p:nvSpPr>
         <p:spPr>
           <a:xfrm>
-            <a:off x="841248" y="4809744"/>
-            <a:ext cx="5715000" cy="530352"/>
+            <a:off x="841248" y="4261104"/>
+            <a:ext cx="5138928" cy="786384"/>
           </a:xfrm>
           <a:prstGeom prst="roundRect">
             <a:avLst>
-              <a:gd name="adj" fmla="val 6000"/>
+              <a:gd name="adj" fmla="val 7000"/>
             </a:avLst>
           </a:prstGeom>
           <a:solidFill>
@@ -10339,9 +10388,55 @@
           </a:p>
         </p:txBody>
       </p:sp>
+      <p:sp>
+        <p:nvSpPr>
+          <p:cNvPr id="23" name="Rounded Rectangle 22"/>
+          <p:cNvSpPr/>
+          <p:nvPr/>
+        </p:nvSpPr>
+        <p:spPr>
+          <a:xfrm>
+            <a:off x="987552" y="4398264"/>
+            <a:ext cx="512064" cy="512064"/>
+          </a:xfrm>
+          <a:prstGeom prst="roundRect">
+            <a:avLst>
+              <a:gd name="adj" fmla="val 26000"/>
+            </a:avLst>
+          </a:prstGeom>
+          <a:solidFill>
+            <a:srgbClr val="EE0000"/>
+          </a:solidFill>
+          <a:ln>
+            <a:noFill/>
+          </a:ln>
+          <a:effectLst/>
+        </p:spPr>
+        <p:style>
+          <a:lnRef idx="1">
+            <a:schemeClr val="accent1"/>
+          </a:lnRef>
+          <a:fillRef idx="3">
+            <a:schemeClr val="accent1"/>
+          </a:fillRef>
+          <a:effectRef idx="2">
+            <a:schemeClr val="accent1"/>
+          </a:effectRef>
+          <a:fontRef idx="minor">
+            <a:schemeClr val="lt1"/>
+          </a:fontRef>
+        </p:style>
+        <p:txBody>
+          <a:bodyPr rtlCol="0" anchor="ctr"/>
+          <a:lstStyle/>
+          <a:p>
+            <a:pPr algn="ctr"/>
+          </a:p>
+        </p:txBody>
+      </p:sp>
       <p:pic>
         <p:nvPicPr>
-          <p:cNvPr id="19" name="Picture 18" descr="check_steel.png"/>
+          <p:cNvPr id="24" name="Picture 23" descr="check_white.png"/>
           <p:cNvPicPr>
             <a:picLocks noChangeAspect="1"/>
           </p:cNvPicPr>
@@ -10355,8 +10450,8 @@
         </p:blipFill>
         <p:spPr>
           <a:xfrm>
-            <a:off x="987552" y="4956048"/>
-            <a:ext cx="237744" cy="237744"/>
+            <a:off x="1110447" y="4521159"/>
+            <a:ext cx="266273" cy="266273"/>
           </a:xfrm>
           <a:prstGeom prst="rect">
             <a:avLst/>
@@ -10365,14 +10460,14 @@
       </p:pic>
       <p:sp>
         <p:nvSpPr>
-          <p:cNvPr id="20" name="TextBox 19"/>
+          <p:cNvPr id="25" name="TextBox 24"/>
           <p:cNvSpPr txBox="1"/>
           <p:nvPr/>
         </p:nvSpPr>
         <p:spPr>
           <a:xfrm>
-            <a:off x="1353312" y="4809744"/>
-            <a:ext cx="5029200" cy="530352"/>
+            <a:off x="1627632" y="4261104"/>
+            <a:ext cx="4206240" cy="786384"/>
           </a:xfrm>
           <a:prstGeom prst="rect">
             <a:avLst/>
@@ -10397,221 +10492,13 @@
               </a:spcAft>
             </a:pPr>
             <a:r>
-              <a:rPr sz="1200" b="0">
+              <a:rPr sz="1150" b="0">
                 <a:solidFill>
                   <a:srgbClr val="1A1A1A"/>
                 </a:solidFill>
                 <a:latin typeface="Red Hat Text"/>
               </a:rPr>
               <a:t>Partitioned update, init container, online resize</a:t>
-            </a:r>
-          </a:p>
-        </p:txBody>
-      </p:sp>
-      <p:sp>
-        <p:nvSpPr>
-          <p:cNvPr id="21" name="Rounded Rectangle 20"/>
-          <p:cNvSpPr/>
-          <p:nvPr/>
-        </p:nvSpPr>
-        <p:spPr>
-          <a:xfrm>
-            <a:off x="6812280" y="2395728"/>
-            <a:ext cx="4538167" cy="2944368"/>
-          </a:xfrm>
-          <a:prstGeom prst="roundRect">
-            <a:avLst>
-              <a:gd name="adj" fmla="val 4000"/>
-            </a:avLst>
-          </a:prstGeom>
-          <a:solidFill>
-            <a:srgbClr val="FFFFFF"/>
-          </a:solidFill>
-          <a:ln w="15240">
-            <a:solidFill>
-              <a:srgbClr val="DDE1E6"/>
-            </a:solidFill>
-          </a:ln>
-          <a:effectLst/>
-        </p:spPr>
-        <p:style>
-          <a:lnRef idx="1">
-            <a:schemeClr val="accent1"/>
-          </a:lnRef>
-          <a:fillRef idx="3">
-            <a:schemeClr val="accent1"/>
-          </a:fillRef>
-          <a:effectRef idx="2">
-            <a:schemeClr val="accent1"/>
-          </a:effectRef>
-          <a:fontRef idx="minor">
-            <a:schemeClr val="lt1"/>
-          </a:fontRef>
-        </p:style>
-        <p:txBody>
-          <a:bodyPr rtlCol="0" anchor="ctr"/>
-          <a:lstStyle/>
-          <a:p>
-            <a:pPr algn="ctr"/>
-          </a:p>
-        </p:txBody>
-      </p:sp>
-      <p:sp>
-        <p:nvSpPr>
-          <p:cNvPr id="22" name="Rounded Rectangle 21"/>
-          <p:cNvSpPr/>
-          <p:nvPr/>
-        </p:nvSpPr>
-        <p:spPr>
-          <a:xfrm>
-            <a:off x="7013448" y="2596896"/>
-            <a:ext cx="1298448" cy="310896"/>
-          </a:xfrm>
-          <a:prstGeom prst="roundRect">
-            <a:avLst>
-              <a:gd name="adj" fmla="val 50000"/>
-            </a:avLst>
-          </a:prstGeom>
-          <a:solidFill>
-            <a:srgbClr val="FCECEC"/>
-          </a:solidFill>
-          <a:ln>
-            <a:noFill/>
-          </a:ln>
-          <a:effectLst/>
-        </p:spPr>
-        <p:style>
-          <a:lnRef idx="1">
-            <a:schemeClr val="accent1"/>
-          </a:lnRef>
-          <a:fillRef idx="3">
-            <a:schemeClr val="accent1"/>
-          </a:fillRef>
-          <a:effectRef idx="2">
-            <a:schemeClr val="accent1"/>
-          </a:effectRef>
-          <a:fontRef idx="minor">
-            <a:schemeClr val="lt1"/>
-          </a:fontRef>
-        </p:style>
-        <p:txBody>
-          <a:bodyPr rtlCol="0" anchor="ctr"/>
-          <a:lstStyle/>
-          <a:p>
-            <a:pPr algn="ctr"/>
-          </a:p>
-        </p:txBody>
-      </p:sp>
-      <p:sp>
-        <p:nvSpPr>
-          <p:cNvPr id="23" name="TextBox 22"/>
-          <p:cNvSpPr txBox="1"/>
-          <p:nvPr/>
-        </p:nvSpPr>
-        <p:spPr>
-          <a:xfrm>
-            <a:off x="7013448" y="2596896"/>
-            <a:ext cx="1298448" cy="310896"/>
-          </a:xfrm>
-          <a:prstGeom prst="rect">
-            <a:avLst/>
-          </a:prstGeom>
-          <a:noFill/>
-        </p:spPr>
-        <p:txBody>
-          <a:bodyPr wrap="none" anchor="ctr" lIns="0" rIns="0" tIns="0" bIns="0">
-            <a:spAutoFit/>
-          </a:bodyPr>
-          <a:lstStyle/>
-          <a:p>
-            <a:pPr algn="ctr">
-              <a:lnSpc>
-                <a:spcPct val="106000"/>
-              </a:lnSpc>
-              <a:spcBef>
-                <a:spcPts val="0"/>
-              </a:spcBef>
-              <a:spcAft>
-                <a:spcPts val="0"/>
-              </a:spcAft>
-            </a:pPr>
-            <a:r>
-              <a:rPr sz="850" b="1">
-                <a:solidFill>
-                  <a:srgbClr val="B80000"/>
-                </a:solidFill>
-                <a:latin typeface="Red Hat Display"/>
-              </a:rPr>
-              <a:t>MEDIA PASS</a:t>
-            </a:r>
-          </a:p>
-        </p:txBody>
-      </p:sp>
-      <p:pic>
-        <p:nvPicPr>
-          <p:cNvPr id="24" name="Picture 23" descr="eye_slate.png"/>
-          <p:cNvPicPr>
-            <a:picLocks noChangeAspect="1"/>
-          </p:cNvPicPr>
-          <p:nvPr/>
-        </p:nvPicPr>
-        <p:blipFill>
-          <a:blip r:embed="rId4"/>
-          <a:stretch>
-            <a:fillRect/>
-          </a:stretch>
-        </p:blipFill>
-        <p:spPr>
-          <a:xfrm>
-            <a:off x="8843619" y="3108960"/>
-            <a:ext cx="475488" cy="475488"/>
-          </a:xfrm>
-          <a:prstGeom prst="rect">
-            <a:avLst/>
-          </a:prstGeom>
-        </p:spPr>
-      </p:pic>
-      <p:sp>
-        <p:nvSpPr>
-          <p:cNvPr id="25" name="TextBox 24"/>
-          <p:cNvSpPr txBox="1"/>
-          <p:nvPr/>
-        </p:nvSpPr>
-        <p:spPr>
-          <a:xfrm>
-            <a:off x="7050024" y="3721608"/>
-            <a:ext cx="4062679" cy="1481328"/>
-          </a:xfrm>
-          <a:prstGeom prst="rect">
-            <a:avLst/>
-          </a:prstGeom>
-          <a:noFill/>
-        </p:spPr>
-        <p:txBody>
-          <a:bodyPr wrap="square" anchor="t" lIns="0" rIns="0" tIns="0" bIns="0">
-            <a:spAutoFit/>
-          </a:bodyPr>
-          <a:lstStyle/>
-          <a:p>
-            <a:pPr algn="l">
-              <a:lnSpc>
-                <a:spcPct val="120000"/>
-              </a:lnSpc>
-              <a:spcBef>
-                <a:spcPts val="0"/>
-              </a:spcBef>
-              <a:spcAft>
-                <a:spcPts val="0"/>
-              </a:spcAft>
-            </a:pPr>
-            <a:r>
-              <a:rPr sz="950" b="0">
-                <a:solidFill>
-                  <a:srgbClr val="8A9099"/>
-                </a:solidFill>
-                <a:latin typeface="Red Hat Text"/>
-              </a:rPr>
-              <a:t>Numbered arc strip: seed → lose → add PVC → survive → inspect → StatefulSet → partition/init/resize.</a:t>
             </a:r>
           </a:p>
         </p:txBody>
@@ -10919,11 +10806,11 @@
         <p:spPr>
           <a:xfrm>
             <a:off x="841248" y="2395728"/>
-            <a:ext cx="5715000" cy="530352"/>
+            <a:ext cx="5138928" cy="786384"/>
           </a:xfrm>
           <a:prstGeom prst="roundRect">
             <a:avLst>
-              <a:gd name="adj" fmla="val 6000"/>
+              <a:gd name="adj" fmla="val 7000"/>
             </a:avLst>
           </a:prstGeom>
           <a:solidFill>
@@ -10958,9 +10845,55 @@
           </a:p>
         </p:txBody>
       </p:sp>
+      <p:sp>
+        <p:nvSpPr>
+          <p:cNvPr id="7" name="Rounded Rectangle 6"/>
+          <p:cNvSpPr/>
+          <p:nvPr/>
+        </p:nvSpPr>
+        <p:spPr>
+          <a:xfrm>
+            <a:off x="987552" y="2532888"/>
+            <a:ext cx="512064" cy="512064"/>
+          </a:xfrm>
+          <a:prstGeom prst="roundRect">
+            <a:avLst>
+              <a:gd name="adj" fmla="val 26000"/>
+            </a:avLst>
+          </a:prstGeom>
+          <a:solidFill>
+            <a:srgbClr val="EE0000"/>
+          </a:solidFill>
+          <a:ln>
+            <a:noFill/>
+          </a:ln>
+          <a:effectLst/>
+        </p:spPr>
+        <p:style>
+          <a:lnRef idx="1">
+            <a:schemeClr val="accent1"/>
+          </a:lnRef>
+          <a:fillRef idx="3">
+            <a:schemeClr val="accent1"/>
+          </a:fillRef>
+          <a:effectRef idx="2">
+            <a:schemeClr val="accent1"/>
+          </a:effectRef>
+          <a:fontRef idx="minor">
+            <a:schemeClr val="lt1"/>
+          </a:fontRef>
+        </p:style>
+        <p:txBody>
+          <a:bodyPr rtlCol="0" anchor="ctr"/>
+          <a:lstStyle/>
+          <a:p>
+            <a:pPr algn="ctr"/>
+          </a:p>
+        </p:txBody>
+      </p:sp>
       <p:pic>
         <p:nvPicPr>
-          <p:cNvPr id="7" name="Picture 6" descr="check_steel.png"/>
+          <p:cNvPr id="8" name="Picture 7" descr="check_white.png"/>
           <p:cNvPicPr>
             <a:picLocks noChangeAspect="1"/>
           </p:cNvPicPr>
@@ -10974,8 +10907,8 @@
         </p:blipFill>
         <p:spPr>
           <a:xfrm>
-            <a:off x="987552" y="2542032"/>
-            <a:ext cx="237744" cy="237744"/>
+            <a:off x="1110447" y="2655783"/>
+            <a:ext cx="266273" cy="266273"/>
           </a:xfrm>
           <a:prstGeom prst="rect">
             <a:avLst/>
@@ -10984,14 +10917,14 @@
       </p:pic>
       <p:sp>
         <p:nvSpPr>
-          <p:cNvPr id="8" name="TextBox 7"/>
+          <p:cNvPr id="9" name="TextBox 8"/>
           <p:cNvSpPr txBox="1"/>
           <p:nvPr/>
         </p:nvSpPr>
         <p:spPr>
           <a:xfrm>
-            <a:off x="1353312" y="2395728"/>
-            <a:ext cx="5029200" cy="530352"/>
+            <a:off x="1627632" y="2395728"/>
+            <a:ext cx="4206240" cy="786384"/>
           </a:xfrm>
           <a:prstGeom prst="rect">
             <a:avLst/>
@@ -11016,7 +10949,7 @@
               </a:spcAft>
             </a:pPr>
             <a:r>
-              <a:rPr sz="1200" b="0">
+              <a:rPr sz="1150" b="0">
                 <a:solidFill>
                   <a:srgbClr val="1A1A1A"/>
                 </a:solidFill>
@@ -11029,18 +10962,18 @@
       </p:sp>
       <p:sp>
         <p:nvSpPr>
-          <p:cNvPr id="9" name="Rounded Rectangle 8"/>
+          <p:cNvPr id="10" name="Rounded Rectangle 9"/>
           <p:cNvSpPr/>
           <p:nvPr/>
         </p:nvSpPr>
         <p:spPr>
           <a:xfrm>
-            <a:off x="841248" y="2999232"/>
-            <a:ext cx="5715000" cy="530352"/>
+            <a:off x="6254496" y="2395728"/>
+            <a:ext cx="5138928" cy="786384"/>
           </a:xfrm>
           <a:prstGeom prst="roundRect">
             <a:avLst>
-              <a:gd name="adj" fmla="val 6000"/>
+              <a:gd name="adj" fmla="val 7000"/>
             </a:avLst>
           </a:prstGeom>
           <a:solidFill>
@@ -11075,9 +11008,55 @@
           </a:p>
         </p:txBody>
       </p:sp>
+      <p:sp>
+        <p:nvSpPr>
+          <p:cNvPr id="11" name="Rounded Rectangle 10"/>
+          <p:cNvSpPr/>
+          <p:nvPr/>
+        </p:nvSpPr>
+        <p:spPr>
+          <a:xfrm>
+            <a:off x="6400800" y="2532888"/>
+            <a:ext cx="512064" cy="512064"/>
+          </a:xfrm>
+          <a:prstGeom prst="roundRect">
+            <a:avLst>
+              <a:gd name="adj" fmla="val 26000"/>
+            </a:avLst>
+          </a:prstGeom>
+          <a:solidFill>
+            <a:srgbClr val="EE0000"/>
+          </a:solidFill>
+          <a:ln>
+            <a:noFill/>
+          </a:ln>
+          <a:effectLst/>
+        </p:spPr>
+        <p:style>
+          <a:lnRef idx="1">
+            <a:schemeClr val="accent1"/>
+          </a:lnRef>
+          <a:fillRef idx="3">
+            <a:schemeClr val="accent1"/>
+          </a:fillRef>
+          <a:effectRef idx="2">
+            <a:schemeClr val="accent1"/>
+          </a:effectRef>
+          <a:fontRef idx="minor">
+            <a:schemeClr val="lt1"/>
+          </a:fontRef>
+        </p:style>
+        <p:txBody>
+          <a:bodyPr rtlCol="0" anchor="ctr"/>
+          <a:lstStyle/>
+          <a:p>
+            <a:pPr algn="ctr"/>
+          </a:p>
+        </p:txBody>
+      </p:sp>
       <p:pic>
         <p:nvPicPr>
-          <p:cNvPr id="10" name="Picture 9" descr="check_steel.png"/>
+          <p:cNvPr id="12" name="Picture 11" descr="check_white.png"/>
           <p:cNvPicPr>
             <a:picLocks noChangeAspect="1"/>
           </p:cNvPicPr>
@@ -11091,8 +11070,8 @@
         </p:blipFill>
         <p:spPr>
           <a:xfrm>
-            <a:off x="987552" y="3145536"/>
-            <a:ext cx="237744" cy="237744"/>
+            <a:off x="6523695" y="2655783"/>
+            <a:ext cx="266273" cy="266273"/>
           </a:xfrm>
           <a:prstGeom prst="rect">
             <a:avLst/>
@@ -11101,14 +11080,14 @@
       </p:pic>
       <p:sp>
         <p:nvSpPr>
-          <p:cNvPr id="11" name="TextBox 10"/>
+          <p:cNvPr id="13" name="TextBox 12"/>
           <p:cNvSpPr txBox="1"/>
           <p:nvPr/>
         </p:nvSpPr>
         <p:spPr>
           <a:xfrm>
-            <a:off x="1353312" y="2999232"/>
-            <a:ext cx="5029200" cy="530352"/>
+            <a:off x="7040880" y="2395728"/>
+            <a:ext cx="4206240" cy="786384"/>
           </a:xfrm>
           <a:prstGeom prst="rect">
             <a:avLst/>
@@ -11133,7 +11112,7 @@
               </a:spcAft>
             </a:pPr>
             <a:r>
-              <a:rPr sz="1200" b="0">
+              <a:rPr sz="1150" b="0">
                 <a:solidFill>
                   <a:srgbClr val="1A1A1A"/>
                 </a:solidFill>
@@ -11146,18 +11125,18 @@
       </p:sp>
       <p:sp>
         <p:nvSpPr>
-          <p:cNvPr id="12" name="Rounded Rectangle 11"/>
+          <p:cNvPr id="14" name="Rounded Rectangle 13"/>
           <p:cNvSpPr/>
           <p:nvPr/>
         </p:nvSpPr>
         <p:spPr>
           <a:xfrm>
-            <a:off x="841248" y="3602736"/>
-            <a:ext cx="5715000" cy="530352"/>
+            <a:off x="841248" y="3328416"/>
+            <a:ext cx="5138928" cy="786384"/>
           </a:xfrm>
           <a:prstGeom prst="roundRect">
             <a:avLst>
-              <a:gd name="adj" fmla="val 6000"/>
+              <a:gd name="adj" fmla="val 7000"/>
             </a:avLst>
           </a:prstGeom>
           <a:solidFill>
@@ -11192,9 +11171,55 @@
           </a:p>
         </p:txBody>
       </p:sp>
+      <p:sp>
+        <p:nvSpPr>
+          <p:cNvPr id="15" name="Rounded Rectangle 14"/>
+          <p:cNvSpPr/>
+          <p:nvPr/>
+        </p:nvSpPr>
+        <p:spPr>
+          <a:xfrm>
+            <a:off x="987552" y="3465576"/>
+            <a:ext cx="512064" cy="512064"/>
+          </a:xfrm>
+          <a:prstGeom prst="roundRect">
+            <a:avLst>
+              <a:gd name="adj" fmla="val 26000"/>
+            </a:avLst>
+          </a:prstGeom>
+          <a:solidFill>
+            <a:srgbClr val="EE0000"/>
+          </a:solidFill>
+          <a:ln>
+            <a:noFill/>
+          </a:ln>
+          <a:effectLst/>
+        </p:spPr>
+        <p:style>
+          <a:lnRef idx="1">
+            <a:schemeClr val="accent1"/>
+          </a:lnRef>
+          <a:fillRef idx="3">
+            <a:schemeClr val="accent1"/>
+          </a:fillRef>
+          <a:effectRef idx="2">
+            <a:schemeClr val="accent1"/>
+          </a:effectRef>
+          <a:fontRef idx="minor">
+            <a:schemeClr val="lt1"/>
+          </a:fontRef>
+        </p:style>
+        <p:txBody>
+          <a:bodyPr rtlCol="0" anchor="ctr"/>
+          <a:lstStyle/>
+          <a:p>
+            <a:pPr algn="ctr"/>
+          </a:p>
+        </p:txBody>
+      </p:sp>
       <p:pic>
         <p:nvPicPr>
-          <p:cNvPr id="13" name="Picture 12" descr="check_steel.png"/>
+          <p:cNvPr id="16" name="Picture 15" descr="check_white.png"/>
           <p:cNvPicPr>
             <a:picLocks noChangeAspect="1"/>
           </p:cNvPicPr>
@@ -11208,8 +11233,8 @@
         </p:blipFill>
         <p:spPr>
           <a:xfrm>
-            <a:off x="987552" y="3749040"/>
-            <a:ext cx="237744" cy="237744"/>
+            <a:off x="1110447" y="3588471"/>
+            <a:ext cx="266273" cy="266273"/>
           </a:xfrm>
           <a:prstGeom prst="rect">
             <a:avLst/>
@@ -11218,14 +11243,14 @@
       </p:pic>
       <p:sp>
         <p:nvSpPr>
-          <p:cNvPr id="14" name="TextBox 13"/>
+          <p:cNvPr id="17" name="TextBox 16"/>
           <p:cNvSpPr txBox="1"/>
           <p:nvPr/>
         </p:nvSpPr>
         <p:spPr>
           <a:xfrm>
-            <a:off x="1353312" y="3602736"/>
-            <a:ext cx="5029200" cy="530352"/>
+            <a:off x="1627632" y="3328416"/>
+            <a:ext cx="4206240" cy="786384"/>
           </a:xfrm>
           <a:prstGeom prst="rect">
             <a:avLst/>
@@ -11250,7 +11275,7 @@
               </a:spcAft>
             </a:pPr>
             <a:r>
-              <a:rPr sz="1200" b="0">
+              <a:rPr sz="1150" b="0">
                 <a:solidFill>
                   <a:srgbClr val="1A1A1A"/>
                 </a:solidFill>
@@ -11263,18 +11288,18 @@
       </p:sp>
       <p:sp>
         <p:nvSpPr>
-          <p:cNvPr id="15" name="Rounded Rectangle 14"/>
+          <p:cNvPr id="18" name="Rounded Rectangle 17"/>
           <p:cNvSpPr/>
           <p:nvPr/>
         </p:nvSpPr>
         <p:spPr>
           <a:xfrm>
-            <a:off x="841248" y="4206240"/>
-            <a:ext cx="5715000" cy="530352"/>
+            <a:off x="6254496" y="3328416"/>
+            <a:ext cx="5138928" cy="786384"/>
           </a:xfrm>
           <a:prstGeom prst="roundRect">
             <a:avLst>
-              <a:gd name="adj" fmla="val 6000"/>
+              <a:gd name="adj" fmla="val 7000"/>
             </a:avLst>
           </a:prstGeom>
           <a:solidFill>
@@ -11309,9 +11334,55 @@
           </a:p>
         </p:txBody>
       </p:sp>
+      <p:sp>
+        <p:nvSpPr>
+          <p:cNvPr id="19" name="Rounded Rectangle 18"/>
+          <p:cNvSpPr/>
+          <p:nvPr/>
+        </p:nvSpPr>
+        <p:spPr>
+          <a:xfrm>
+            <a:off x="6400800" y="3465576"/>
+            <a:ext cx="512064" cy="512064"/>
+          </a:xfrm>
+          <a:prstGeom prst="roundRect">
+            <a:avLst>
+              <a:gd name="adj" fmla="val 26000"/>
+            </a:avLst>
+          </a:prstGeom>
+          <a:solidFill>
+            <a:srgbClr val="EE0000"/>
+          </a:solidFill>
+          <a:ln>
+            <a:noFill/>
+          </a:ln>
+          <a:effectLst/>
+        </p:spPr>
+        <p:style>
+          <a:lnRef idx="1">
+            <a:schemeClr val="accent1"/>
+          </a:lnRef>
+          <a:fillRef idx="3">
+            <a:schemeClr val="accent1"/>
+          </a:fillRef>
+          <a:effectRef idx="2">
+            <a:schemeClr val="accent1"/>
+          </a:effectRef>
+          <a:fontRef idx="minor">
+            <a:schemeClr val="lt1"/>
+          </a:fontRef>
+        </p:style>
+        <p:txBody>
+          <a:bodyPr rtlCol="0" anchor="ctr"/>
+          <a:lstStyle/>
+          <a:p>
+            <a:pPr algn="ctr"/>
+          </a:p>
+        </p:txBody>
+      </p:sp>
       <p:pic>
         <p:nvPicPr>
-          <p:cNvPr id="16" name="Picture 15" descr="check_steel.png"/>
+          <p:cNvPr id="20" name="Picture 19" descr="check_white.png"/>
           <p:cNvPicPr>
             <a:picLocks noChangeAspect="1"/>
           </p:cNvPicPr>
@@ -11325,8 +11396,8 @@
         </p:blipFill>
         <p:spPr>
           <a:xfrm>
-            <a:off x="987552" y="4352544"/>
-            <a:ext cx="237744" cy="237744"/>
+            <a:off x="6523695" y="3588471"/>
+            <a:ext cx="266273" cy="266273"/>
           </a:xfrm>
           <a:prstGeom prst="rect">
             <a:avLst/>
@@ -11335,14 +11406,14 @@
       </p:pic>
       <p:sp>
         <p:nvSpPr>
-          <p:cNvPr id="17" name="TextBox 16"/>
+          <p:cNvPr id="21" name="TextBox 20"/>
           <p:cNvSpPr txBox="1"/>
           <p:nvPr/>
         </p:nvSpPr>
         <p:spPr>
           <a:xfrm>
-            <a:off x="1353312" y="4206240"/>
-            <a:ext cx="5029200" cy="530352"/>
+            <a:off x="7040880" y="3328416"/>
+            <a:ext cx="4206240" cy="786384"/>
           </a:xfrm>
           <a:prstGeom prst="rect">
             <a:avLst/>
@@ -11367,7 +11438,7 @@
               </a:spcAft>
             </a:pPr>
             <a:r>
-              <a:rPr sz="1200" b="0">
+              <a:rPr sz="1150" b="0">
                 <a:solidFill>
                   <a:srgbClr val="1A1A1A"/>
                 </a:solidFill>
@@ -11380,18 +11451,18 @@
       </p:sp>
       <p:sp>
         <p:nvSpPr>
-          <p:cNvPr id="18" name="Rounded Rectangle 17"/>
+          <p:cNvPr id="22" name="Rounded Rectangle 21"/>
           <p:cNvSpPr/>
           <p:nvPr/>
         </p:nvSpPr>
         <p:spPr>
           <a:xfrm>
-            <a:off x="841248" y="4809744"/>
-            <a:ext cx="5715000" cy="530352"/>
+            <a:off x="841248" y="4261104"/>
+            <a:ext cx="5138928" cy="786384"/>
           </a:xfrm>
           <a:prstGeom prst="roundRect">
             <a:avLst>
-              <a:gd name="adj" fmla="val 6000"/>
+              <a:gd name="adj" fmla="val 7000"/>
             </a:avLst>
           </a:prstGeom>
           <a:solidFill>
@@ -11426,9 +11497,55 @@
           </a:p>
         </p:txBody>
       </p:sp>
+      <p:sp>
+        <p:nvSpPr>
+          <p:cNvPr id="23" name="Rounded Rectangle 22"/>
+          <p:cNvSpPr/>
+          <p:nvPr/>
+        </p:nvSpPr>
+        <p:spPr>
+          <a:xfrm>
+            <a:off x="987552" y="4398264"/>
+            <a:ext cx="512064" cy="512064"/>
+          </a:xfrm>
+          <a:prstGeom prst="roundRect">
+            <a:avLst>
+              <a:gd name="adj" fmla="val 26000"/>
+            </a:avLst>
+          </a:prstGeom>
+          <a:solidFill>
+            <a:srgbClr val="EE0000"/>
+          </a:solidFill>
+          <a:ln>
+            <a:noFill/>
+          </a:ln>
+          <a:effectLst/>
+        </p:spPr>
+        <p:style>
+          <a:lnRef idx="1">
+            <a:schemeClr val="accent1"/>
+          </a:lnRef>
+          <a:fillRef idx="3">
+            <a:schemeClr val="accent1"/>
+          </a:fillRef>
+          <a:effectRef idx="2">
+            <a:schemeClr val="accent1"/>
+          </a:effectRef>
+          <a:fontRef idx="minor">
+            <a:schemeClr val="lt1"/>
+          </a:fontRef>
+        </p:style>
+        <p:txBody>
+          <a:bodyPr rtlCol="0" anchor="ctr"/>
+          <a:lstStyle/>
+          <a:p>
+            <a:pPr algn="ctr"/>
+          </a:p>
+        </p:txBody>
+      </p:sp>
       <p:pic>
         <p:nvPicPr>
-          <p:cNvPr id="19" name="Picture 18" descr="check_steel.png"/>
+          <p:cNvPr id="24" name="Picture 23" descr="check_white.png"/>
           <p:cNvPicPr>
             <a:picLocks noChangeAspect="1"/>
           </p:cNvPicPr>
@@ -11442,8 +11559,8 @@
         </p:blipFill>
         <p:spPr>
           <a:xfrm>
-            <a:off x="987552" y="4956048"/>
-            <a:ext cx="237744" cy="237744"/>
+            <a:off x="1110447" y="4521159"/>
+            <a:ext cx="266273" cy="266273"/>
           </a:xfrm>
           <a:prstGeom prst="rect">
             <a:avLst/>
@@ -11452,14 +11569,14 @@
       </p:pic>
       <p:sp>
         <p:nvSpPr>
-          <p:cNvPr id="20" name="TextBox 19"/>
+          <p:cNvPr id="25" name="TextBox 24"/>
           <p:cNvSpPr txBox="1"/>
           <p:nvPr/>
         </p:nvSpPr>
         <p:spPr>
           <a:xfrm>
-            <a:off x="1353312" y="4809744"/>
-            <a:ext cx="5029200" cy="530352"/>
+            <a:off x="1627632" y="4261104"/>
+            <a:ext cx="4206240" cy="786384"/>
           </a:xfrm>
           <a:prstGeom prst="rect">
             <a:avLst/>
@@ -11484,7 +11601,7 @@
               </a:spcAft>
             </a:pPr>
             <a:r>
-              <a:rPr sz="1200" b="0">
+              <a:rPr sz="1150" b="0">
                 <a:solidFill>
                   <a:srgbClr val="1A1A1A"/>
                 </a:solidFill>
@@ -11495,16 +11612,310 @@
           </a:p>
         </p:txBody>
       </p:sp>
-      <p:sp>
-        <p:nvSpPr>
-          <p:cNvPr id="21" name="Rounded Rectangle 20"/>
+      <p:cxnSp>
+        <p:nvCxnSpPr>
+          <p:cNvPr id="26" name="Connector 25"/>
+          <p:cNvCxnSpPr/>
+          <p:nvPr/>
+        </p:nvCxnSpPr>
+        <p:spPr>
+          <a:xfrm>
+            <a:off x="841248" y="6437376"/>
+            <a:ext cx="10509199" cy="0"/>
+          </a:xfrm>
+          <a:prstGeom prst="bentConnector3">
+            <a:avLst/>
+          </a:prstGeom>
+          <a:ln w="12700">
+            <a:solidFill>
+              <a:srgbClr val="DDE1E6"/>
+            </a:solidFill>
+          </a:ln>
+          <a:effectLst/>
+        </p:spPr>
+        <p:style>
+          <a:lnRef idx="2">
+            <a:schemeClr val="accent1"/>
+          </a:lnRef>
+          <a:fillRef idx="0">
+            <a:schemeClr val="accent1"/>
+          </a:fillRef>
+          <a:effectRef idx="1">
+            <a:schemeClr val="accent1"/>
+          </a:effectRef>
+          <a:fontRef idx="minor">
+            <a:schemeClr val="tx1"/>
+          </a:fontRef>
+        </p:style>
+      </p:cxnSp>
+      <p:sp>
+        <p:nvSpPr>
+          <p:cNvPr id="27" name="TextBox 26"/>
+          <p:cNvSpPr txBox="1"/>
+          <p:nvPr/>
+        </p:nvSpPr>
+        <p:spPr>
+          <a:xfrm>
+            <a:off x="841248" y="6473952"/>
+            <a:ext cx="7315200" cy="274320"/>
+          </a:xfrm>
+          <a:prstGeom prst="rect">
+            <a:avLst/>
+          </a:prstGeom>
+          <a:noFill/>
+        </p:spPr>
+        <p:txBody>
+          <a:bodyPr wrap="square" anchor="t" lIns="0" rIns="0" tIns="0" bIns="0">
+            <a:spAutoFit/>
+          </a:bodyPr>
+          <a:lstStyle/>
+          <a:p>
+            <a:pPr algn="l">
+              <a:lnSpc>
+                <a:spcPct val="106000"/>
+              </a:lnSpc>
+              <a:spcBef>
+                <a:spcPts val="0"/>
+              </a:spcBef>
+              <a:spcAft>
+                <a:spcPts val="0"/>
+              </a:spcAft>
+            </a:pPr>
+            <a:r>
+              <a:rPr sz="950" b="0">
+                <a:solidFill>
+                  <a:srgbClr val="8A9099"/>
+                </a:solidFill>
+                <a:latin typeface="Red Hat Text"/>
+              </a:rPr>
+              <a:t>CONFIDENTIAL</a:t>
+            </a:r>
+          </a:p>
+        </p:txBody>
+      </p:sp>
+      <p:sp>
+        <p:nvSpPr>
+          <p:cNvPr id="28" name="TextBox 27"/>
+          <p:cNvSpPr txBox="1"/>
+          <p:nvPr/>
+        </p:nvSpPr>
+        <p:spPr>
+          <a:xfrm>
+            <a:off x="10801807" y="6473952"/>
+            <a:ext cx="548640" cy="274320"/>
+          </a:xfrm>
+          <a:prstGeom prst="rect">
+            <a:avLst/>
+          </a:prstGeom>
+          <a:noFill/>
+        </p:spPr>
+        <p:txBody>
+          <a:bodyPr wrap="square" anchor="t" lIns="0" rIns="0" tIns="0" bIns="0">
+            <a:spAutoFit/>
+          </a:bodyPr>
+          <a:lstStyle/>
+          <a:p>
+            <a:pPr algn="r">
+              <a:lnSpc>
+                <a:spcPct val="106000"/>
+              </a:lnSpc>
+              <a:spcBef>
+                <a:spcPts val="0"/>
+              </a:spcBef>
+              <a:spcAft>
+                <a:spcPts val="0"/>
+              </a:spcAft>
+            </a:pPr>
+            <a:r>
+              <a:rPr sz="950" b="0">
+                <a:solidFill>
+                  <a:srgbClr val="8A9099"/>
+                </a:solidFill>
+                <a:latin typeface="Red Hat Text"/>
+              </a:rPr>
+              <a:t>7</a:t>
+            </a:r>
+          </a:p>
+        </p:txBody>
+      </p:sp>
+    </p:spTree>
+  </p:cSld>
+  <p:clrMapOvr>
+    <a:masterClrMapping/>
+  </p:clrMapOvr>
+</p:sld>
+</file>
+
+<file path=ppt/slides/slide9.xml><?xml version="1.0" encoding="utf-8"?>
+<p:sld xmlns:a="http://schemas.openxmlformats.org/drawingml/2006/main" xmlns:p="http://schemas.openxmlformats.org/presentationml/2006/main" xmlns:r="http://schemas.openxmlformats.org/officeDocument/2006/relationships">
+  <p:cSld>
+    <p:spTree>
+      <p:nvGrpSpPr>
+        <p:cNvPr id="1" name=""/>
+        <p:cNvGrpSpPr/>
+        <p:nvPr/>
+      </p:nvGrpSpPr>
+      <p:grpSpPr/>
+      <p:pic>
+        <p:nvPicPr>
+          <p:cNvPr id="2" name="Picture 1" descr="redhat_logo.jpg"/>
+          <p:cNvPicPr>
+            <a:picLocks noChangeAspect="1"/>
+          </p:cNvPicPr>
+          <p:nvPr/>
+        </p:nvPicPr>
+        <p:blipFill>
+          <a:blip r:embed="rId2"/>
+          <a:stretch>
+            <a:fillRect/>
+          </a:stretch>
+        </p:blipFill>
+        <p:spPr>
+          <a:xfrm>
+            <a:off x="10326319" y="475488"/>
+            <a:ext cx="1024128" cy="242248"/>
+          </a:xfrm>
+          <a:prstGeom prst="rect">
+            <a:avLst/>
+          </a:prstGeom>
+        </p:spPr>
+      </p:pic>
+      <p:sp>
+        <p:nvSpPr>
+          <p:cNvPr id="3" name="TextBox 2"/>
+          <p:cNvSpPr txBox="1"/>
+          <p:nvPr/>
+        </p:nvSpPr>
+        <p:spPr>
+          <a:xfrm>
+            <a:off x="841248" y="548640"/>
+            <a:ext cx="8595360" cy="274320"/>
+          </a:xfrm>
+          <a:prstGeom prst="rect">
+            <a:avLst/>
+          </a:prstGeom>
+          <a:noFill/>
+        </p:spPr>
+        <p:txBody>
+          <a:bodyPr wrap="square" anchor="t" lIns="0" rIns="0" tIns="0" bIns="0">
+            <a:spAutoFit/>
+          </a:bodyPr>
+          <a:lstStyle/>
+          <a:p>
+            <a:pPr algn="l">
+              <a:lnSpc>
+                <a:spcPct val="106000"/>
+              </a:lnSpc>
+              <a:spcBef>
+                <a:spcPts val="0"/>
+              </a:spcBef>
+              <a:spcAft>
+                <a:spcPts val="0"/>
+              </a:spcAft>
+            </a:pPr>
+            <a:r>
+              <a:rPr sz="1250" b="1" spc="220">
+                <a:solidFill>
+                  <a:srgbClr val="EE0000"/>
+                </a:solidFill>
+                <a:latin typeface="Red Hat Display"/>
+              </a:rPr>
+              <a:t>M05 · STORAGE &amp; STATEFUL APPS</a:t>
+            </a:r>
+          </a:p>
+        </p:txBody>
+      </p:sp>
+      <p:sp>
+        <p:nvSpPr>
+          <p:cNvPr id="4" name="TextBox 3"/>
+          <p:cNvSpPr txBox="1"/>
+          <p:nvPr/>
+        </p:nvSpPr>
+        <p:spPr>
+          <a:xfrm>
+            <a:off x="841248" y="877824"/>
+            <a:ext cx="10515600" cy="548640"/>
+          </a:xfrm>
+          <a:prstGeom prst="rect">
+            <a:avLst/>
+          </a:prstGeom>
+          <a:noFill/>
+        </p:spPr>
+        <p:txBody>
+          <a:bodyPr wrap="none" anchor="t" lIns="0" rIns="0" tIns="0" bIns="0">
+            <a:spAutoFit/>
+          </a:bodyPr>
+          <a:lstStyle/>
+          <a:p>
+            <a:pPr algn="l">
+              <a:lnSpc>
+                <a:spcPct val="100000"/>
+              </a:lnSpc>
+              <a:spcBef>
+                <a:spcPts val="0"/>
+              </a:spcBef>
+              <a:spcAft>
+                <a:spcPts val="0"/>
+              </a:spcAft>
+            </a:pPr>
+            <a:r>
+              <a:rPr sz="2500" b="1">
+                <a:solidFill>
+                  <a:srgbClr val="1A1A1A"/>
+                </a:solidFill>
+                <a:latin typeface="Red Hat Display"/>
+              </a:rPr>
+              <a:t>What you built</a:t>
+            </a:r>
+          </a:p>
+        </p:txBody>
+      </p:sp>
+      <p:cxnSp>
+        <p:nvCxnSpPr>
+          <p:cNvPr id="5" name="Connector 4"/>
+          <p:cNvCxnSpPr/>
+          <p:nvPr/>
+        </p:nvCxnSpPr>
+        <p:spPr>
+          <a:xfrm>
+            <a:off x="841248" y="1554480"/>
+            <a:ext cx="1371600" cy="0"/>
+          </a:xfrm>
+          <a:prstGeom prst="bentConnector3">
+            <a:avLst/>
+          </a:prstGeom>
+          <a:ln w="31750">
+            <a:solidFill>
+              <a:srgbClr val="EE0000"/>
+            </a:solidFill>
+          </a:ln>
+          <a:effectLst/>
+        </p:spPr>
+        <p:style>
+          <a:lnRef idx="2">
+            <a:schemeClr val="accent1"/>
+          </a:lnRef>
+          <a:fillRef idx="0">
+            <a:schemeClr val="accent1"/>
+          </a:fillRef>
+          <a:effectRef idx="1">
+            <a:schemeClr val="accent1"/>
+          </a:effectRef>
+          <a:fontRef idx="minor">
+            <a:schemeClr val="tx1"/>
+          </a:fontRef>
+        </p:style>
+      </p:cxnSp>
+      <p:sp>
+        <p:nvSpPr>
+          <p:cNvPr id="6" name="Rounded Rectangle 5"/>
           <p:cNvSpPr/>
           <p:nvPr/>
         </p:nvSpPr>
         <p:spPr>
           <a:xfrm>
-            <a:off x="6812280" y="2395728"/>
-            <a:ext cx="4538167" cy="2944368"/>
+            <a:off x="841248" y="2331720"/>
+            <a:ext cx="10509199" cy="3794760"/>
           </a:xfrm>
           <a:prstGeom prst="roundRect">
             <a:avLst>
@@ -11543,169 +11954,33 @@
           </a:p>
         </p:txBody>
       </p:sp>
-      <p:sp>
-        <p:nvSpPr>
-          <p:cNvPr id="22" name="Rounded Rectangle 21"/>
-          <p:cNvSpPr/>
-          <p:nvPr/>
-        </p:nvSpPr>
-        <p:spPr>
-          <a:xfrm>
-            <a:off x="7013448" y="2596896"/>
-            <a:ext cx="1298448" cy="310896"/>
-          </a:xfrm>
-          <a:prstGeom prst="roundRect">
-            <a:avLst>
-              <a:gd name="adj" fmla="val 50000"/>
-            </a:avLst>
-          </a:prstGeom>
-          <a:solidFill>
-            <a:srgbClr val="FCECEC"/>
-          </a:solidFill>
-          <a:ln>
-            <a:noFill/>
-          </a:ln>
-          <a:effectLst/>
-        </p:spPr>
-        <p:style>
-          <a:lnRef idx="1">
-            <a:schemeClr val="accent1"/>
-          </a:lnRef>
-          <a:fillRef idx="3">
-            <a:schemeClr val="accent1"/>
-          </a:fillRef>
-          <a:effectRef idx="2">
-            <a:schemeClr val="accent1"/>
-          </a:effectRef>
-          <a:fontRef idx="minor">
-            <a:schemeClr val="lt1"/>
-          </a:fontRef>
-        </p:style>
-        <p:txBody>
-          <a:bodyPr rtlCol="0" anchor="ctr"/>
-          <a:lstStyle/>
-          <a:p>
-            <a:pPr algn="ctr"/>
-          </a:p>
-        </p:txBody>
-      </p:sp>
-      <p:sp>
-        <p:nvSpPr>
-          <p:cNvPr id="23" name="TextBox 22"/>
-          <p:cNvSpPr txBox="1"/>
-          <p:nvPr/>
-        </p:nvSpPr>
-        <p:spPr>
-          <a:xfrm>
-            <a:off x="7013448" y="2596896"/>
-            <a:ext cx="1298448" cy="310896"/>
-          </a:xfrm>
-          <a:prstGeom prst="rect">
-            <a:avLst/>
-          </a:prstGeom>
-          <a:noFill/>
-        </p:spPr>
-        <p:txBody>
-          <a:bodyPr wrap="none" anchor="ctr" lIns="0" rIns="0" tIns="0" bIns="0">
-            <a:spAutoFit/>
-          </a:bodyPr>
-          <a:lstStyle/>
-          <a:p>
-            <a:pPr algn="ctr">
-              <a:lnSpc>
-                <a:spcPct val="106000"/>
-              </a:lnSpc>
-              <a:spcBef>
-                <a:spcPts val="0"/>
-              </a:spcBef>
-              <a:spcAft>
-                <a:spcPts val="0"/>
-              </a:spcAft>
-            </a:pPr>
-            <a:r>
-              <a:rPr sz="850" b="1">
-                <a:solidFill>
-                  <a:srgbClr val="B80000"/>
-                </a:solidFill>
-                <a:latin typeface="Red Hat Display"/>
-              </a:rPr>
-              <a:t>MEDIA PASS</a:t>
-            </a:r>
-          </a:p>
-        </p:txBody>
-      </p:sp>
       <p:pic>
         <p:nvPicPr>
-          <p:cNvPr id="24" name="Picture 23" descr="eye_slate.png"/>
+          <p:cNvPr id="7" name="Picture 6" descr="04-what-you-built.png"/>
           <p:cNvPicPr>
             <a:picLocks noChangeAspect="1"/>
           </p:cNvPicPr>
           <p:nvPr/>
         </p:nvPicPr>
         <p:blipFill>
-          <a:blip r:embed="rId4"/>
+          <a:blip r:embed="rId3"/>
           <a:stretch>
             <a:fillRect/>
           </a:stretch>
         </p:blipFill>
         <p:spPr>
           <a:xfrm>
-            <a:off x="8843619" y="3108960"/>
-            <a:ext cx="475488" cy="475488"/>
+            <a:off x="1801640" y="2532888"/>
+            <a:ext cx="8588415" cy="3392424"/>
           </a:xfrm>
           <a:prstGeom prst="rect">
             <a:avLst/>
           </a:prstGeom>
         </p:spPr>
       </p:pic>
-      <p:sp>
-        <p:nvSpPr>
-          <p:cNvPr id="25" name="TextBox 24"/>
-          <p:cNvSpPr txBox="1"/>
-          <p:nvPr/>
-        </p:nvSpPr>
-        <p:spPr>
-          <a:xfrm>
-            <a:off x="7050024" y="3721608"/>
-            <a:ext cx="4062679" cy="1481328"/>
-          </a:xfrm>
-          <a:prstGeom prst="rect">
-            <a:avLst/>
-          </a:prstGeom>
-          <a:noFill/>
-        </p:spPr>
-        <p:txBody>
-          <a:bodyPr wrap="square" anchor="t" lIns="0" rIns="0" tIns="0" bIns="0">
-            <a:spAutoFit/>
-          </a:bodyPr>
-          <a:lstStyle/>
-          <a:p>
-            <a:pPr algn="l">
-              <a:lnSpc>
-                <a:spcPct val="120000"/>
-              </a:lnSpc>
-              <a:spcBef>
-                <a:spcPts val="0"/>
-              </a:spcBef>
-              <a:spcAft>
-                <a:spcPts val="0"/>
-              </a:spcAft>
-            </a:pPr>
-            <a:r>
-              <a:rPr sz="950" b="0">
-                <a:solidFill>
-                  <a:srgbClr val="8A9099"/>
-                </a:solidFill>
-                <a:latin typeface="Red Hat Text"/>
-              </a:rPr>
-              <a:t>Decision card — raw StatefulSet (primitives) → database Operator (production, its own project), with a managed data service as the hands-off alternative; footnote pointer to the backup module.</a:t>
-            </a:r>
-          </a:p>
-        </p:txBody>
-      </p:sp>
       <p:cxnSp>
         <p:nvCxnSpPr>
-          <p:cNvPr id="26" name="Connector 25"/>
+          <p:cNvPr id="8" name="Connector 7"/>
           <p:cNvCxnSpPr/>
           <p:nvPr/>
         </p:nvCxnSpPr>
@@ -11741,7 +12016,7 @@
       </p:cxnSp>
       <p:sp>
         <p:nvSpPr>
-          <p:cNvPr id="27" name="TextBox 26"/>
+          <p:cNvPr id="9" name="TextBox 8"/>
           <p:cNvSpPr txBox="1"/>
           <p:nvPr/>
         </p:nvSpPr>
@@ -11786,7 +12061,7 @@
       </p:sp>
       <p:sp>
         <p:nvSpPr>
-          <p:cNvPr id="28" name="TextBox 27"/>
+          <p:cNvPr id="10" name="TextBox 9"/>
           <p:cNvSpPr txBox="1"/>
           <p:nvPr/>
         </p:nvSpPr>
@@ -11824,7 +12099,7 @@
                 </a:solidFill>
                 <a:latin typeface="Red Hat Text"/>
               </a:rPr>
-              <a:t>7</a:t>
+              <a:t>8</a:t>
             </a:r>
           </a:p>
         </p:txBody>
